--- a/GCO_Collection_2slides.pptx
+++ b/GCO_Collection_2slides.pptx
@@ -7,9 +7,10 @@
   <p:sldIdLst>
     <p:sldId id="256" r:id="rId2"/>
     <p:sldId id="257" r:id="rId3"/>
+    <p:sldId id="258" r:id="rId4"/>
   </p:sldIdLst>
   <p:notesMasterIdLst>
-    <p:notesMasterId r:id="rId4"/>
+    <p:notesMasterId r:id="rId5"/>
   </p:notesMasterIdLst>
   <p:sldSz cx="12192000" cy="6858000"/>
   <p:notesSz cx="6858000" cy="12192000"/>
@@ -503,7 +504,7 @@
           <a:p>
             <a:r>
               <a:rPr lang="en-US" dirty="0"/>
-              <a:t>How we collect. Logs are preferably a PUSH - a sink sends them to Pub/Sub and our Python drains it, which removes polling and the rate limit. If a sink isn't available or is delayed, we fall back to PULLING logs via the Logging API, exactly like metrics (the dashed line) - it works, but it's subject to a read-rate quota. Metrics are always a PULL because GCO has no sink for metrics; we size that poll to stay inside the free million time-series tier. Everything writes to Mongo, and downstream dashboards and anomaly models read Mongo, not GCP. So our stack barely changes: Python on our Linux boxes, Mongo as the store.</a:t>
+              <a:t>What we collect. Two kinds of numbers, both pulled as metrics. Infra metrics (heap, CPU, connections) - poll the Monitoring API like today. Business-transaction / SRE numbers (availability, errors, slow calls) - these are log-based metrics: GCO applies a filter to the logs and computes the count or ratio at the source, and we just read the resulting number. Crucially we do NOT collect raw logs and we do NOT need a sink - that whole pipeline is dropped. Everything writes to Mongo; dashboards and anomaly models read Mongo.</a:t>
             </a:r>
             <a:endParaRPr lang="en-US" dirty="0"/>
           </a:p>
@@ -591,7 +592,7 @@
           <a:p>
             <a:r>
               <a:rPr lang="en-US" dirty="0"/>
-              <a:t>What we need, in priority order. 1: a per-job service account with read-only roles on the right projects, keyless if possible. 2: a sink to Pub/Sub for the logs, with our own subscription. 3: our logging read quota, and confirmation our fields are ingested and retained. 4: whether our hosts can use gRPC or are REST-only, and who owns/approves sink creation. Everything else is in the doc.</a:t>
+              <a:t>How the Splunk query maps over. Today: index + query (filter), stats/eval (aggregate), table by datacenter (break out), stored one row per BT per datacenter in Mongo. In GCO a log-based metric does the same three things: the metric's log filter equals our index+query; a counter handles total/errors and a distribution handles response time; labels (datacenter + BT name) are our table columns. We read those as time series and assemble the same Mongo document. Two dependencies: our status/response-time fields must be structured jsonPayload (a distribution can only read a real numeric field), and datacenter x BT name is our time-series cardinality against the 1M free tier. Failure % / custom availability we keep in Python.</a:t>
             </a:r>
             <a:endParaRPr lang="en-US" dirty="0"/>
           </a:p>
@@ -615,6 +616,94 @@
             <a:fld id="{F7021451-1387-4CA6-816F-3879F97B5CBC}" type="slidenum">
               <a:rPr lang="en-US"/>
               <a:t>2</a:t>
+            </a:fld>
+            <a:endParaRPr lang="en-US"/>
+          </a:p>
+        </p:txBody>
+      </p:sp>
+    </p:spTree>
+    <p:extLst>
+      <p:ext uri="{BB962C8B-B14F-4D97-AF65-F5344CB8AC3E}">
+        <p14:creationId xmlns:p14="http://schemas.microsoft.com/office/powerpoint/2010/main" val="1024086991"/>
+      </p:ext>
+    </p:extLst>
+  </p:cSld>
+  <p:clrMapOvr>
+    <a:masterClrMapping/>
+  </p:clrMapOvr>
+</p:notes>
+</file>
+
+<file path=ppt/notesSlides/notesSlide3.xml><?xml version="1.0" encoding="utf-8"?>
+<p:notes xmlns:a="http://schemas.openxmlformats.org/drawingml/2006/main" xmlns:r="http://schemas.openxmlformats.org/officeDocument/2006/relationships" xmlns:p="http://schemas.openxmlformats.org/presentationml/2006/main">
+  <p:cSld>
+    <p:spTree>
+      <p:nvGrpSpPr>
+        <p:cNvPr id="1" name=""/>
+        <p:cNvGrpSpPr/>
+        <p:nvPr/>
+      </p:nvGrpSpPr>
+      <p:grpSpPr>
+        <a:xfrm>
+          <a:off x="0" y="0"/>
+          <a:ext cx="0" cy="0"/>
+          <a:chOff x="0" y="0"/>
+          <a:chExt cx="0" cy="0"/>
+        </a:xfrm>
+      </p:grpSpPr>
+      <p:sp>
+        <p:nvSpPr>
+          <p:cNvPr id="2" name="Slide Image Placeholder 1"/>
+          <p:cNvSpPr>
+            <a:spLocks noGrp="1" noRot="1" noChangeAspect="1"/>
+          </p:cNvSpPr>
+          <p:nvPr>
+            <p:ph type="sldImg"/>
+          </p:nvPr>
+        </p:nvSpPr>
+        <p:spPr/>
+      </p:sp>
+      <p:sp>
+        <p:nvSpPr>
+          <p:cNvPr id="3" name="Notes Placeholder 2"/>
+          <p:cNvSpPr>
+            <a:spLocks noGrp="1"/>
+          </p:cNvSpPr>
+          <p:nvPr>
+            <p:ph type="body" idx="1"/>
+          </p:nvPr>
+        </p:nvSpPr>
+        <p:spPr/>
+        <p:txBody>
+          <a:bodyPr/>
+          <a:lstStyle/>
+          <a:p>
+            <a:r>
+              <a:rPr lang="en-US" dirty="0"/>
+              <a:t>What we need, priority order. 1: per-job service account, read-only roles, keyless if possible. 2: define our log-based metrics - counters for total/errors/availability, distribution for response time, labelled datacenter + BT. Ask who owns creating them. 3: confirm our BT fields are structured jsonPayload, and get a rough datacenter x BT count to size against the free tier. 4: gRPC vs REST on our hosts, and who approves metric/quota requests and the SLA.</a:t>
+            </a:r>
+            <a:endParaRPr lang="en-US" dirty="0"/>
+          </a:p>
+        </p:txBody>
+      </p:sp>
+      <p:sp>
+        <p:nvSpPr>
+          <p:cNvPr id="4" name="Slide Number Placeholder 3"/>
+          <p:cNvSpPr>
+            <a:spLocks noGrp="1"/>
+          </p:cNvSpPr>
+          <p:nvPr>
+            <p:ph type="sldNum" sz="quarter" idx="10"/>
+          </p:nvPr>
+        </p:nvSpPr>
+        <p:spPr/>
+        <p:txBody>
+          <a:bodyPr/>
+          <a:lstStyle/>
+          <a:p>
+            <a:fld id="{F7021451-1387-4CA6-816F-3879F97B5CBC}" type="slidenum">
+              <a:rPr lang="en-US"/>
+              <a:t>3</a:t>
             </a:fld>
             <a:endParaRPr lang="en-US"/>
           </a:p>
@@ -973,7 +1062,7 @@
         <p:spPr>
           <a:xfrm>
             <a:off x="548640" y="384048"/>
-            <a:ext cx="8778240" cy="457200"/>
+            <a:ext cx="10241280" cy="457200"/>
           </a:xfrm>
           <a:prstGeom prst="rect">
             <a:avLst/>
@@ -997,7 +1086,7 @@
                 <a:ea typeface="Calibri" pitchFamily="34" charset="-122"/>
                 <a:cs typeface="Calibri" pitchFamily="34" charset="-120"/>
               </a:rPr>
-              <a:t>Moving log &amp; metric collection to Google Cloud Observability</a:t>
+              <a:t>Moving observability collection to Google Cloud</a:t>
             </a:r>
             <a:endParaRPr lang="en-US" sz="2600" dirty="0"/>
           </a:p>
@@ -1036,7 +1125,7 @@
                 <a:ea typeface="Calibri" pitchFamily="34" charset="-122"/>
                 <a:cs typeface="Calibri" pitchFamily="34" charset="-120"/>
               </a:rPr>
-              <a:t>How we'll collect</a:t>
+              <a:t>What we collect — numbers, not raw logs</a:t>
             </a:r>
             <a:endParaRPr lang="en-US" sz="1600" dirty="0"/>
           </a:p>
@@ -1050,8 +1139,8 @@
         </p:nvSpPr>
         <p:spPr>
           <a:xfrm>
-            <a:off x="10515600" y="457200"/>
-            <a:ext cx="1097280" cy="411480"/>
+            <a:off x="10972800" y="457200"/>
+            <a:ext cx="868680" cy="411480"/>
           </a:xfrm>
           <a:prstGeom prst="roundRect">
             <a:avLst>
@@ -1072,8 +1161,8 @@
         </p:nvSpPr>
         <p:spPr>
           <a:xfrm>
-            <a:off x="10515600" y="457200"/>
-            <a:ext cx="1097280" cy="411480"/>
+            <a:off x="10972800" y="457200"/>
+            <a:ext cx="868680" cy="411480"/>
           </a:xfrm>
           <a:prstGeom prst="rect">
             <a:avLst/>
@@ -1097,7 +1186,7 @@
                 <a:ea typeface="Calibri" pitchFamily="34" charset="-122"/>
                 <a:cs typeface="Calibri" pitchFamily="34" charset="-120"/>
               </a:rPr>
-              <a:t>1 / 2</a:t>
+              <a:t>1 / 3</a:t>
             </a:r>
             <a:endParaRPr lang="en-US" sz="1300" dirty="0"/>
           </a:p>
@@ -1112,11 +1201,11 @@
         <p:spPr>
           <a:xfrm>
             <a:off x="548640" y="1554480"/>
-            <a:ext cx="5074920" cy="1783080"/>
+            <a:ext cx="5074920" cy="1737360"/>
           </a:xfrm>
           <a:prstGeom prst="roundRect">
             <a:avLst>
-              <a:gd name="adj" fmla="val 4615"/>
+              <a:gd name="adj" fmla="val 4737"/>
             </a:avLst>
           </a:prstGeom>
           <a:solidFill>
@@ -1147,7 +1236,7 @@
             <a:avLst/>
           </a:prstGeom>
           <a:solidFill>
-            <a:srgbClr val="065A82"/>
+            <a:srgbClr val="1C7293"/>
           </a:solidFill>
           <a:ln/>
         </p:spPr>
@@ -1184,8 +1273,8 @@
         </p:nvSpPr>
         <p:spPr>
           <a:xfrm>
-            <a:off x="1508760" y="1737360"/>
-            <a:ext cx="2743200" cy="320040"/>
+            <a:off x="1508760" y="1755648"/>
+            <a:ext cx="3657600" cy="292608"/>
           </a:xfrm>
           <a:prstGeom prst="rect">
             <a:avLst/>
@@ -1209,7 +1298,7 @@
                 <a:ea typeface="Calibri" pitchFamily="34" charset="-122"/>
                 <a:cs typeface="Calibri" pitchFamily="34" charset="-120"/>
               </a:rPr>
-              <a:t>LOGS</a:t>
+              <a:t>INFRA METRICS</a:t>
             </a:r>
             <a:endParaRPr lang="en-US" sz="1500" dirty="0"/>
           </a:p>
@@ -1223,8 +1312,8 @@
         </p:nvSpPr>
         <p:spPr>
           <a:xfrm>
-            <a:off x="1508760" y="2029968"/>
-            <a:ext cx="2926080" cy="274320"/>
+            <a:off x="1508760" y="2048256"/>
+            <a:ext cx="3108960" cy="274320"/>
           </a:xfrm>
           <a:prstGeom prst="rect">
             <a:avLst/>
@@ -1248,7 +1337,7 @@
                 <a:ea typeface="Calibri" pitchFamily="34" charset="-122"/>
                 <a:cs typeface="Calibri" pitchFamily="34" charset="-120"/>
               </a:rPr>
-              <a:t>replaces Splunk</a:t>
+              <a:t>replaces AppDynamics</a:t>
             </a:r>
             <a:endParaRPr lang="en-US" sz="1200" dirty="0"/>
           </a:p>
@@ -1262,7 +1351,7 @@
         </p:nvSpPr>
         <p:spPr>
           <a:xfrm>
-            <a:off x="868680" y="2395728"/>
+            <a:off x="868680" y="2450592"/>
             <a:ext cx="4617720" cy="274320"/>
           </a:xfrm>
           <a:prstGeom prst="rect">
@@ -1281,13 +1370,13 @@
             <a:r>
               <a:rPr lang="en-US" sz="1200" b="1" dirty="0">
                 <a:solidFill>
-                  <a:srgbClr val="2E8B6F"/>
-                </a:solidFill>
-                <a:latin typeface="Calibri" pitchFamily="34" charset="0"/>
-                <a:ea typeface="Calibri" pitchFamily="34" charset="-122"/>
-                <a:cs typeface="Calibri" pitchFamily="34" charset="-120"/>
-              </a:rPr>
-              <a:t>PUSH</a:t>
+                  <a:srgbClr val="065A82"/>
+                </a:solidFill>
+                <a:latin typeface="Calibri" pitchFamily="34" charset="0"/>
+                <a:ea typeface="Calibri" pitchFamily="34" charset="-122"/>
+                <a:cs typeface="Calibri" pitchFamily="34" charset="-120"/>
+              </a:rPr>
+              <a:t>PULL</a:t>
             </a:r>
             <a:pPr indent="0" marL="0">
               <a:buNone/>
@@ -1301,7 +1390,7 @@
                 <a:ea typeface="Calibri" pitchFamily="34" charset="-122"/>
                 <a:cs typeface="Calibri" pitchFamily="34" charset="-120"/>
               </a:rPr>
-              <a:t>  (preferred) — sink → Pub/Sub → Python</a:t>
+              <a:t>  Monitoring API (heap, CPU, connections)</a:t>
             </a:r>
             <a:endParaRPr lang="en-US" sz="1200" dirty="0"/>
           </a:p>
@@ -1315,60 +1404,7 @@
         </p:nvSpPr>
         <p:spPr>
           <a:xfrm>
-            <a:off x="868680" y="2670048"/>
-            <a:ext cx="4617720" cy="274320"/>
-          </a:xfrm>
-          <a:prstGeom prst="rect">
-            <a:avLst/>
-          </a:prstGeom>
-          <a:noFill/>
-          <a:ln/>
-        </p:spPr>
-        <p:txBody>
-          <a:bodyPr wrap="square" lIns="0" tIns="0" rIns="0" bIns="0" rtlCol="0" anchor="ctr"/>
-          <a:lstStyle/>
-          <a:p>
-            <a:pPr indent="0" marL="0">
-              <a:buNone/>
-            </a:pPr>
-            <a:r>
-              <a:rPr lang="en-US" sz="1200" b="1" dirty="0">
-                <a:solidFill>
-                  <a:srgbClr val="065A82"/>
-                </a:solidFill>
-                <a:latin typeface="Calibri" pitchFamily="34" charset="0"/>
-                <a:ea typeface="Calibri" pitchFamily="34" charset="-122"/>
-                <a:cs typeface="Calibri" pitchFamily="34" charset="-120"/>
-              </a:rPr>
-              <a:t>PULL</a:t>
-            </a:r>
-            <a:pPr indent="0" marL="0">
-              <a:buNone/>
-            </a:pPr>
-            <a:r>
-              <a:rPr lang="en-US" sz="1200" dirty="0">
-                <a:solidFill>
-                  <a:srgbClr val="1A1A2E"/>
-                </a:solidFill>
-                <a:latin typeface="Calibri" pitchFamily="34" charset="0"/>
-                <a:ea typeface="Calibri" pitchFamily="34" charset="-122"/>
-                <a:cs typeface="Calibri" pitchFamily="34" charset="-120"/>
-              </a:rPr>
-              <a:t>  (fallback) — poll the Logging API, like metrics</a:t>
-            </a:r>
-            <a:endParaRPr lang="en-US" sz="1200" dirty="0"/>
-          </a:p>
-        </p:txBody>
-      </p:sp>
-      <p:sp>
-        <p:nvSpPr>
-          <p:cNvPr id="13" name="Text 10"/>
-          <p:cNvSpPr/>
-          <p:nvPr/>
-        </p:nvSpPr>
-        <p:spPr>
-          <a:xfrm>
-            <a:off x="868680" y="2944368"/>
+            <a:off x="868680" y="2724912"/>
             <a:ext cx="4617720" cy="457200"/>
           </a:xfrm>
           <a:prstGeom prst="rect">
@@ -1385,7 +1421,7 @@
               <a:buNone/>
             </a:pPr>
             <a:r>
-              <a:rPr lang="en-US" sz="1050" dirty="0">
+              <a:rPr lang="en-US" sz="1100" dirty="0">
                 <a:solidFill>
                   <a:srgbClr val="5B6B7B"/>
                 </a:solidFill>
@@ -1393,26 +1429,26 @@
                 <a:ea typeface="Calibri" pitchFamily="34" charset="-122"/>
                 <a:cs typeface="Calibri" pitchFamily="34" charset="-120"/>
               </a:rPr>
-              <a:t>Push if a sink is available; otherwise we poll. Pull works for logs, but has a read-rate limit.</a:t>
-            </a:r>
-            <a:endParaRPr lang="en-US" sz="1050" dirty="0"/>
-          </a:p>
-        </p:txBody>
-      </p:sp>
-      <p:sp>
-        <p:nvSpPr>
-          <p:cNvPr id="14" name="Shape 11"/>
-          <p:cNvSpPr/>
-          <p:nvPr/>
-        </p:nvSpPr>
-        <p:spPr>
-          <a:xfrm>
-            <a:off x="548640" y="3474720"/>
-            <a:ext cx="5074920" cy="1783080"/>
+              <a:t>Poll the Monitoring API on a cron, like today. Size to stay inside the free tier.</a:t>
+            </a:r>
+            <a:endParaRPr lang="en-US" sz="1100" dirty="0"/>
+          </a:p>
+        </p:txBody>
+      </p:sp>
+      <p:sp>
+        <p:nvSpPr>
+          <p:cNvPr id="13" name="Shape 10"/>
+          <p:cNvSpPr/>
+          <p:nvPr/>
+        </p:nvSpPr>
+        <p:spPr>
+          <a:xfrm>
+            <a:off x="548640" y="3429000"/>
+            <a:ext cx="5074920" cy="1874520"/>
           </a:xfrm>
           <a:prstGeom prst="roundRect">
             <a:avLst>
-              <a:gd name="adj" fmla="val 4615"/>
+              <a:gd name="adj" fmla="val 4390"/>
             </a:avLst>
           </a:prstGeom>
           <a:solidFill>
@@ -1430,27 +1466,27 @@
       </p:sp>
       <p:sp>
         <p:nvSpPr>
-          <p:cNvPr id="15" name="Shape 12"/>
-          <p:cNvSpPr/>
-          <p:nvPr/>
-        </p:nvSpPr>
-        <p:spPr>
-          <a:xfrm>
-            <a:off x="777240" y="3703320"/>
+          <p:cNvPr id="14" name="Shape 11"/>
+          <p:cNvSpPr/>
+          <p:nvPr/>
+        </p:nvSpPr>
+        <p:spPr>
+          <a:xfrm>
+            <a:off x="777240" y="3657600"/>
             <a:ext cx="566928" cy="566928"/>
           </a:xfrm>
           <a:prstGeom prst="ellipse">
             <a:avLst/>
           </a:prstGeom>
           <a:solidFill>
-            <a:srgbClr val="1C7293"/>
+            <a:srgbClr val="2E8B6F"/>
           </a:solidFill>
           <a:ln/>
         </p:spPr>
       </p:sp>
       <p:pic>
         <p:nvPicPr>
-          <p:cNvPr id="16" name="Image 1" descr="preencoded.png">    </p:cNvPr>
+          <p:cNvPr id="15" name="Image 1" descr="preencoded.png">    </p:cNvPr>
           <p:cNvPicPr>
             <a:picLocks noChangeAspect="1"/>
           </p:cNvPicPr>
@@ -1464,8 +1500,8 @@
         </p:blipFill>
         <p:spPr>
           <a:xfrm>
-            <a:off x="886968" y="3813048"/>
-            <a:ext cx="347472" cy="347472"/>
+            <a:off x="914400" y="3767328"/>
+            <a:ext cx="292608" cy="347472"/>
           </a:xfrm>
           <a:prstGeom prst="rect">
             <a:avLst/>
@@ -1474,40 +1510,79 @@
       </p:pic>
       <p:sp>
         <p:nvSpPr>
+          <p:cNvPr id="16" name="Text 12"/>
+          <p:cNvSpPr/>
+          <p:nvPr/>
+        </p:nvSpPr>
+        <p:spPr>
+          <a:xfrm>
+            <a:off x="1508760" y="3630168"/>
+            <a:ext cx="4023360" cy="292608"/>
+          </a:xfrm>
+          <a:prstGeom prst="rect">
+            <a:avLst/>
+          </a:prstGeom>
+          <a:noFill/>
+          <a:ln/>
+        </p:spPr>
+        <p:txBody>
+          <a:bodyPr wrap="square" lIns="0" tIns="0" rIns="0" bIns="0" rtlCol="0" anchor="ctr"/>
+          <a:lstStyle/>
+          <a:p>
+            <a:pPr indent="0" marL="0">
+              <a:buNone/>
+            </a:pPr>
+            <a:r>
+              <a:rPr lang="en-US" sz="1450" b="1" dirty="0">
+                <a:solidFill>
+                  <a:srgbClr val="21295C"/>
+                </a:solidFill>
+                <a:latin typeface="Calibri" pitchFamily="34" charset="0"/>
+                <a:ea typeface="Calibri" pitchFamily="34" charset="-122"/>
+                <a:cs typeface="Calibri" pitchFamily="34" charset="-120"/>
+              </a:rPr>
+              <a:t>BUSINESS TXN / SRE NUMBERS</a:t>
+            </a:r>
+            <a:endParaRPr lang="en-US" sz="1450" dirty="0"/>
+          </a:p>
+        </p:txBody>
+      </p:sp>
+      <p:sp>
+        <p:nvSpPr>
           <p:cNvPr id="17" name="Text 13"/>
           <p:cNvSpPr/>
           <p:nvPr/>
         </p:nvSpPr>
         <p:spPr>
           <a:xfrm>
-            <a:off x="1508760" y="3657600"/>
-            <a:ext cx="2743200" cy="320040"/>
-          </a:xfrm>
-          <a:prstGeom prst="rect">
-            <a:avLst/>
-          </a:prstGeom>
-          <a:noFill/>
-          <a:ln/>
-        </p:spPr>
-        <p:txBody>
-          <a:bodyPr wrap="square" lIns="0" tIns="0" rIns="0" bIns="0" rtlCol="0" anchor="ctr"/>
-          <a:lstStyle/>
-          <a:p>
-            <a:pPr indent="0" marL="0">
-              <a:buNone/>
-            </a:pPr>
-            <a:r>
-              <a:rPr lang="en-US" sz="1500" b="1" dirty="0">
-                <a:solidFill>
-                  <a:srgbClr val="21295C"/>
-                </a:solidFill>
-                <a:latin typeface="Calibri" pitchFamily="34" charset="0"/>
-                <a:ea typeface="Calibri" pitchFamily="34" charset="-122"/>
-                <a:cs typeface="Calibri" pitchFamily="34" charset="-120"/>
-              </a:rPr>
-              <a:t>METRICS</a:t>
-            </a:r>
-            <a:endParaRPr lang="en-US" sz="1500" dirty="0"/>
+            <a:off x="1508760" y="3922776"/>
+            <a:ext cx="3474720" cy="274320"/>
+          </a:xfrm>
+          <a:prstGeom prst="rect">
+            <a:avLst/>
+          </a:prstGeom>
+          <a:noFill/>
+          <a:ln/>
+        </p:spPr>
+        <p:txBody>
+          <a:bodyPr wrap="square" lIns="0" tIns="0" rIns="0" bIns="0" rtlCol="0" anchor="ctr"/>
+          <a:lstStyle/>
+          <a:p>
+            <a:pPr indent="0" marL="0">
+              <a:buNone/>
+            </a:pPr>
+            <a:r>
+              <a:rPr lang="en-US" sz="1200" i="1" dirty="0">
+                <a:solidFill>
+                  <a:srgbClr val="5B6B7B"/>
+                </a:solidFill>
+                <a:latin typeface="Calibri" pitchFamily="34" charset="0"/>
+                <a:ea typeface="Calibri" pitchFamily="34" charset="-122"/>
+                <a:cs typeface="Calibri" pitchFamily="34" charset="-120"/>
+              </a:rPr>
+              <a:t>replaces Splunk stats queries</a:t>
+            </a:r>
+            <a:endParaRPr lang="en-US" sz="1200" dirty="0"/>
           </a:p>
         </p:txBody>
       </p:sp>
@@ -1519,24 +1594,77 @@
         </p:nvSpPr>
         <p:spPr>
           <a:xfrm>
-            <a:off x="1508760" y="3950208"/>
-            <a:ext cx="3108960" cy="274320"/>
-          </a:xfrm>
-          <a:prstGeom prst="rect">
-            <a:avLst/>
-          </a:prstGeom>
-          <a:noFill/>
-          <a:ln/>
-        </p:spPr>
-        <p:txBody>
-          <a:bodyPr wrap="square" lIns="0" tIns="0" rIns="0" bIns="0" rtlCol="0" anchor="ctr"/>
-          <a:lstStyle/>
-          <a:p>
-            <a:pPr indent="0" marL="0">
-              <a:buNone/>
-            </a:pPr>
-            <a:r>
-              <a:rPr lang="en-US" sz="1200" i="1" dirty="0">
+            <a:off x="868680" y="4325112"/>
+            <a:ext cx="4663440" cy="274320"/>
+          </a:xfrm>
+          <a:prstGeom prst="rect">
+            <a:avLst/>
+          </a:prstGeom>
+          <a:noFill/>
+          <a:ln/>
+        </p:spPr>
+        <p:txBody>
+          <a:bodyPr wrap="square" lIns="0" tIns="0" rIns="0" bIns="0" rtlCol="0" anchor="ctr"/>
+          <a:lstStyle/>
+          <a:p>
+            <a:pPr indent="0" marL="0">
+              <a:buNone/>
+            </a:pPr>
+            <a:r>
+              <a:rPr lang="en-US" sz="1150" b="1" dirty="0">
+                <a:solidFill>
+                  <a:srgbClr val="065A82"/>
+                </a:solidFill>
+                <a:latin typeface="Calibri" pitchFamily="34" charset="0"/>
+                <a:ea typeface="Calibri" pitchFamily="34" charset="-122"/>
+                <a:cs typeface="Calibri" pitchFamily="34" charset="-120"/>
+              </a:rPr>
+              <a:t>PULL</a:t>
+            </a:r>
+            <a:pPr indent="0" marL="0">
+              <a:buNone/>
+            </a:pPr>
+            <a:r>
+              <a:rPr lang="en-US" sz="1150" dirty="0">
+                <a:solidFill>
+                  <a:srgbClr val="1A1A2E"/>
+                </a:solidFill>
+                <a:latin typeface="Calibri" pitchFamily="34" charset="0"/>
+                <a:ea typeface="Calibri" pitchFamily="34" charset="-122"/>
+                <a:cs typeface="Calibri" pitchFamily="34" charset="-120"/>
+              </a:rPr>
+              <a:t>  log-based metrics (availability, errors, slow calls)</a:t>
+            </a:r>
+            <a:endParaRPr lang="en-US" sz="1150" dirty="0"/>
+          </a:p>
+        </p:txBody>
+      </p:sp>
+      <p:sp>
+        <p:nvSpPr>
+          <p:cNvPr id="19" name="Text 15"/>
+          <p:cNvSpPr/>
+          <p:nvPr/>
+        </p:nvSpPr>
+        <p:spPr>
+          <a:xfrm>
+            <a:off x="868680" y="4599432"/>
+            <a:ext cx="4663440" cy="594360"/>
+          </a:xfrm>
+          <a:prstGeom prst="rect">
+            <a:avLst/>
+          </a:prstGeom>
+          <a:noFill/>
+          <a:ln/>
+        </p:spPr>
+        <p:txBody>
+          <a:bodyPr wrap="square" lIns="0" tIns="0" rIns="0" bIns="0" rtlCol="0" anchor="ctr"/>
+          <a:lstStyle/>
+          <a:p>
+            <a:pPr indent="0" marL="0">
+              <a:buNone/>
+            </a:pPr>
+            <a:r>
+              <a:rPr lang="en-US" sz="1100" dirty="0">
                 <a:solidFill>
                   <a:srgbClr val="5B6B7B"/>
                 </a:solidFill>
@@ -1544,107 +1672,15 @@
                 <a:ea typeface="Calibri" pitchFamily="34" charset="-122"/>
                 <a:cs typeface="Calibri" pitchFamily="34" charset="-120"/>
               </a:rPr>
-              <a:t>replaces AppDynamics</a:t>
-            </a:r>
-            <a:endParaRPr lang="en-US" sz="1200" dirty="0"/>
-          </a:p>
-        </p:txBody>
-      </p:sp>
-      <p:sp>
-        <p:nvSpPr>
-          <p:cNvPr id="19" name="Text 15"/>
-          <p:cNvSpPr/>
-          <p:nvPr/>
-        </p:nvSpPr>
-        <p:spPr>
-          <a:xfrm>
-            <a:off x="868680" y="4370832"/>
-            <a:ext cx="4572000" cy="274320"/>
-          </a:xfrm>
-          <a:prstGeom prst="rect">
-            <a:avLst/>
-          </a:prstGeom>
-          <a:noFill/>
-          <a:ln/>
-        </p:spPr>
-        <p:txBody>
-          <a:bodyPr wrap="square" lIns="0" tIns="0" rIns="0" bIns="0" rtlCol="0" anchor="ctr"/>
-          <a:lstStyle/>
-          <a:p>
-            <a:pPr indent="0" marL="0">
-              <a:buNone/>
-            </a:pPr>
-            <a:r>
-              <a:rPr lang="en-US" sz="1250" b="1" dirty="0">
-                <a:solidFill>
-                  <a:srgbClr val="065A82"/>
-                </a:solidFill>
-                <a:latin typeface="Calibri" pitchFamily="34" charset="0"/>
-                <a:ea typeface="Calibri" pitchFamily="34" charset="-122"/>
-                <a:cs typeface="Calibri" pitchFamily="34" charset="-120"/>
-              </a:rPr>
-              <a:t>PULL</a:t>
-            </a:r>
-            <a:pPr indent="0" marL="0">
-              <a:buNone/>
-            </a:pPr>
-            <a:r>
-              <a:rPr lang="en-US" sz="1250" dirty="0">
-                <a:solidFill>
-                  <a:srgbClr val="1A1A2E"/>
-                </a:solidFill>
-                <a:latin typeface="Calibri" pitchFamily="34" charset="0"/>
-                <a:ea typeface="Calibri" pitchFamily="34" charset="-122"/>
-                <a:cs typeface="Calibri" pitchFamily="34" charset="-120"/>
-              </a:rPr>
-              <a:t>  — poll the Monitoring API (cron)</a:t>
-            </a:r>
-            <a:endParaRPr lang="en-US" sz="1250" dirty="0"/>
+              <a:t>GCO computes the counts/ratios from logs at the source. We read the numbers — never the raw logs.</a:t>
+            </a:r>
+            <a:endParaRPr lang="en-US" sz="1100" dirty="0"/>
           </a:p>
         </p:txBody>
       </p:sp>
       <p:sp>
         <p:nvSpPr>
           <p:cNvPr id="20" name="Text 16"/>
-          <p:cNvSpPr/>
-          <p:nvPr/>
-        </p:nvSpPr>
-        <p:spPr>
-          <a:xfrm>
-            <a:off x="868680" y="4645152"/>
-            <a:ext cx="4617720" cy="502920"/>
-          </a:xfrm>
-          <a:prstGeom prst="rect">
-            <a:avLst/>
-          </a:prstGeom>
-          <a:noFill/>
-          <a:ln/>
-        </p:spPr>
-        <p:txBody>
-          <a:bodyPr wrap="square" lIns="0" tIns="0" rIns="0" bIns="0" rtlCol="0" anchor="ctr"/>
-          <a:lstStyle/>
-          <a:p>
-            <a:pPr indent="0" marL="0">
-              <a:buNone/>
-            </a:pPr>
-            <a:r>
-              <a:rPr lang="en-US" sz="1100" dirty="0">
-                <a:solidFill>
-                  <a:srgbClr val="5B6B7B"/>
-                </a:solidFill>
-                <a:latin typeface="Calibri" pitchFamily="34" charset="0"/>
-                <a:ea typeface="Calibri" pitchFamily="34" charset="-122"/>
-                <a:cs typeface="Calibri" pitchFamily="34" charset="-120"/>
-              </a:rPr>
-              <a:t>No sink exists for metrics, so we keep polling. Sized to stay inside the free tier.</a:t>
-            </a:r>
-            <a:endParaRPr lang="en-US" sz="1100" dirty="0"/>
-          </a:p>
-        </p:txBody>
-      </p:sp>
-      <p:sp>
-        <p:nvSpPr>
-          <p:cNvPr id="21" name="Text 17"/>
           <p:cNvSpPr/>
           <p:nvPr/>
         </p:nvSpPr>
@@ -1675,7 +1711,7 @@
                 <a:ea typeface="Calibri" pitchFamily="34" charset="-122"/>
                 <a:cs typeface="Calibri" pitchFamily="34" charset="-120"/>
               </a:rPr>
-              <a:t>Both land in one place</a:t>
+              <a:t>Everything is a metric pull → Mongo</a:t>
             </a:r>
             <a:endParaRPr lang="en-US" sz="1500" dirty="0"/>
           </a:p>
@@ -1683,29 +1719,29 @@
       </p:sp>
       <p:sp>
         <p:nvSpPr>
-          <p:cNvPr id="22" name="Shape 18"/>
-          <p:cNvSpPr/>
-          <p:nvPr/>
-        </p:nvSpPr>
-        <p:spPr>
-          <a:xfrm>
-            <a:off x="6126480" y="1965960"/>
-            <a:ext cx="2377440" cy="731520"/>
+          <p:cNvPr id="21" name="Shape 17"/>
+          <p:cNvSpPr/>
+          <p:nvPr/>
+        </p:nvSpPr>
+        <p:spPr>
+          <a:xfrm>
+            <a:off x="6126480" y="2057400"/>
+            <a:ext cx="2514600" cy="822960"/>
           </a:xfrm>
           <a:prstGeom prst="roundRect">
             <a:avLst>
-              <a:gd name="adj" fmla="val 10000"/>
+              <a:gd name="adj" fmla="val 8889"/>
             </a:avLst>
           </a:prstGeom>
           <a:solidFill>
-            <a:srgbClr val="065A82"/>
+            <a:srgbClr val="1C7293"/>
           </a:solidFill>
           <a:ln/>
         </p:spPr>
       </p:sp>
       <p:pic>
         <p:nvPicPr>
-          <p:cNvPr id="23" name="Image 2" descr="preencoded.png">    </p:cNvPr>
+          <p:cNvPr id="22" name="Image 2" descr="preencoded.png">    </p:cNvPr>
           <p:cNvPicPr>
             <a:picLocks noChangeAspect="1"/>
           </p:cNvPicPr>
@@ -1719,7 +1755,7 @@
         </p:blipFill>
         <p:spPr>
           <a:xfrm>
-            <a:off x="6309360" y="2148840"/>
+            <a:off x="6309360" y="2286000"/>
             <a:ext cx="365760" cy="365760"/>
           </a:xfrm>
           <a:prstGeom prst="rect">
@@ -1729,30 +1765,30 @@
       </p:pic>
       <p:sp>
         <p:nvSpPr>
-          <p:cNvPr id="24" name="Text 19"/>
-          <p:cNvSpPr/>
-          <p:nvPr/>
-        </p:nvSpPr>
-        <p:spPr>
-          <a:xfrm>
-            <a:off x="6693408" y="1965960"/>
-            <a:ext cx="1783080" cy="731520"/>
-          </a:xfrm>
-          <a:prstGeom prst="rect">
-            <a:avLst/>
-          </a:prstGeom>
-          <a:noFill/>
-          <a:ln/>
-        </p:spPr>
-        <p:txBody>
-          <a:bodyPr wrap="square" lIns="0" tIns="0" rIns="0" bIns="0" rtlCol="0" anchor="ctr"/>
-          <a:lstStyle/>
-          <a:p>
-            <a:pPr indent="0" marL="0">
-              <a:buNone/>
-            </a:pPr>
-            <a:r>
-              <a:rPr lang="en-US" sz="1200" b="1" dirty="0">
+          <p:cNvPr id="23" name="Text 18"/>
+          <p:cNvSpPr/>
+          <p:nvPr/>
+        </p:nvSpPr>
+        <p:spPr>
+          <a:xfrm>
+            <a:off x="6748272" y="2057400"/>
+            <a:ext cx="1828800" cy="822960"/>
+          </a:xfrm>
+          <a:prstGeom prst="rect">
+            <a:avLst/>
+          </a:prstGeom>
+          <a:noFill/>
+          <a:ln/>
+        </p:spPr>
+        <p:txBody>
+          <a:bodyPr wrap="square" lIns="0" tIns="0" rIns="0" bIns="0" rtlCol="0" anchor="ctr"/>
+          <a:lstStyle/>
+          <a:p>
+            <a:pPr indent="0" marL="0">
+              <a:buNone/>
+            </a:pPr>
+            <a:r>
+              <a:rPr lang="en-US" sz="1150" b="1" dirty="0">
                 <a:solidFill>
                   <a:srgbClr val="FFFFFF"/>
                 </a:solidFill>
@@ -1760,37 +1796,54 @@
                 <a:ea typeface="Calibri" pitchFamily="34" charset="-122"/>
                 <a:cs typeface="Calibri" pitchFamily="34" charset="-120"/>
               </a:rPr>
-              <a:t>Sink → Pub/Sub</a:t>
-            </a:r>
-            <a:endParaRPr lang="en-US" sz="1200" dirty="0"/>
-          </a:p>
-        </p:txBody>
-      </p:sp>
-      <p:sp>
-        <p:nvSpPr>
-          <p:cNvPr id="25" name="Shape 20"/>
-          <p:cNvSpPr/>
-          <p:nvPr/>
-        </p:nvSpPr>
-        <p:spPr>
-          <a:xfrm>
-            <a:off x="6126480" y="2788920"/>
-            <a:ext cx="2377440" cy="731520"/>
+              <a:t>Monitoring API</a:t>
+            </a:r>
+            <a:endParaRPr lang="en-US" sz="1150" dirty="0"/>
+          </a:p>
+          <a:p>
+            <a:pPr indent="0" marL="0">
+              <a:buNone/>
+            </a:pPr>
+            <a:r>
+              <a:rPr lang="en-US" sz="1150" b="1" dirty="0">
+                <a:solidFill>
+                  <a:srgbClr val="FFFFFF"/>
+                </a:solidFill>
+                <a:latin typeface="Calibri" pitchFamily="34" charset="0"/>
+                <a:ea typeface="Calibri" pitchFamily="34" charset="-122"/>
+                <a:cs typeface="Calibri" pitchFamily="34" charset="-120"/>
+              </a:rPr>
+              <a:t>(infra metrics)</a:t>
+            </a:r>
+            <a:endParaRPr lang="en-US" sz="1150" dirty="0"/>
+          </a:p>
+        </p:txBody>
+      </p:sp>
+      <p:sp>
+        <p:nvSpPr>
+          <p:cNvPr id="24" name="Shape 19"/>
+          <p:cNvSpPr/>
+          <p:nvPr/>
+        </p:nvSpPr>
+        <p:spPr>
+          <a:xfrm>
+            <a:off x="6126480" y="3063240"/>
+            <a:ext cx="2514600" cy="822960"/>
           </a:xfrm>
           <a:prstGeom prst="roundRect">
             <a:avLst>
-              <a:gd name="adj" fmla="val 10000"/>
+              <a:gd name="adj" fmla="val 8889"/>
             </a:avLst>
           </a:prstGeom>
           <a:solidFill>
-            <a:srgbClr val="8FA9BC"/>
+            <a:srgbClr val="2E8B6F"/>
           </a:solidFill>
           <a:ln/>
         </p:spPr>
       </p:sp>
       <p:pic>
         <p:nvPicPr>
-          <p:cNvPr id="26" name="Image 3" descr="preencoded.png">    </p:cNvPr>
+          <p:cNvPr id="25" name="Image 3" descr="preencoded.png">    </p:cNvPr>
           <p:cNvPicPr>
             <a:picLocks noChangeAspect="1"/>
           </p:cNvPicPr>
@@ -1804,8 +1857,8 @@
         </p:blipFill>
         <p:spPr>
           <a:xfrm>
-            <a:off x="6309360" y="2971800"/>
-            <a:ext cx="365760" cy="365760"/>
+            <a:off x="6345936" y="3291840"/>
+            <a:ext cx="292608" cy="365760"/>
           </a:xfrm>
           <a:prstGeom prst="rect">
             <a:avLst/>
@@ -1814,30 +1867,30 @@
       </p:pic>
       <p:sp>
         <p:nvSpPr>
-          <p:cNvPr id="27" name="Text 21"/>
-          <p:cNvSpPr/>
-          <p:nvPr/>
-        </p:nvSpPr>
-        <p:spPr>
-          <a:xfrm>
-            <a:off x="6693408" y="2788920"/>
-            <a:ext cx="1783080" cy="731520"/>
-          </a:xfrm>
-          <a:prstGeom prst="rect">
-            <a:avLst/>
-          </a:prstGeom>
-          <a:noFill/>
-          <a:ln/>
-        </p:spPr>
-        <p:txBody>
-          <a:bodyPr wrap="square" lIns="0" tIns="0" rIns="0" bIns="0" rtlCol="0" anchor="ctr"/>
-          <a:lstStyle/>
-          <a:p>
-            <a:pPr indent="0" marL="0">
-              <a:buNone/>
-            </a:pPr>
-            <a:r>
-              <a:rPr lang="en-US" sz="1200" b="1" dirty="0">
+          <p:cNvPr id="26" name="Text 20"/>
+          <p:cNvSpPr/>
+          <p:nvPr/>
+        </p:nvSpPr>
+        <p:spPr>
+          <a:xfrm>
+            <a:off x="6748272" y="3063240"/>
+            <a:ext cx="1828800" cy="822960"/>
+          </a:xfrm>
+          <a:prstGeom prst="rect">
+            <a:avLst/>
+          </a:prstGeom>
+          <a:noFill/>
+          <a:ln/>
+        </p:spPr>
+        <p:txBody>
+          <a:bodyPr wrap="square" lIns="0" tIns="0" rIns="0" bIns="0" rtlCol="0" anchor="ctr"/>
+          <a:lstStyle/>
+          <a:p>
+            <a:pPr indent="0" marL="0">
+              <a:buNone/>
+            </a:pPr>
+            <a:r>
+              <a:rPr lang="en-US" sz="1150" b="1" dirty="0">
                 <a:solidFill>
                   <a:srgbClr val="FFFFFF"/>
                 </a:solidFill>
@@ -1845,11 +1898,52 @@
                 <a:ea typeface="Calibri" pitchFamily="34" charset="-122"/>
                 <a:cs typeface="Calibri" pitchFamily="34" charset="-120"/>
               </a:rPr>
-              <a:t>Logging API</a:t>
-            </a:r>
-            <a:endParaRPr lang="en-US" sz="1200" dirty="0"/>
-          </a:p>
-        </p:txBody>
+              <a:t>Log-based metrics</a:t>
+            </a:r>
+            <a:endParaRPr lang="en-US" sz="1150" dirty="0"/>
+          </a:p>
+          <a:p>
+            <a:pPr indent="0" marL="0">
+              <a:buNone/>
+            </a:pPr>
+            <a:r>
+              <a:rPr lang="en-US" sz="1150" b="1" dirty="0">
+                <a:solidFill>
+                  <a:srgbClr val="FFFFFF"/>
+                </a:solidFill>
+                <a:latin typeface="Calibri" pitchFamily="34" charset="0"/>
+                <a:ea typeface="Calibri" pitchFamily="34" charset="-122"/>
+                <a:cs typeface="Calibri" pitchFamily="34" charset="-120"/>
+              </a:rPr>
+              <a:t>(business txn)</a:t>
+            </a:r>
+            <a:endParaRPr lang="en-US" sz="1150" dirty="0"/>
+          </a:p>
+        </p:txBody>
+      </p:sp>
+      <p:sp>
+        <p:nvSpPr>
+          <p:cNvPr id="27" name="Shape 21"/>
+          <p:cNvSpPr/>
+          <p:nvPr/>
+        </p:nvSpPr>
+        <p:spPr>
+          <a:xfrm>
+            <a:off x="8641080" y="2468880"/>
+            <a:ext cx="777240" cy="502920"/>
+          </a:xfrm>
+          <a:prstGeom prst="line">
+            <a:avLst/>
+          </a:prstGeom>
+          <a:noFill/>
+          <a:ln w="22225">
+            <a:solidFill>
+              <a:srgbClr val="5B6B7B"/>
+            </a:solidFill>
+            <a:prstDash val="solid"/>
+            <a:tailEnd type="triangle"/>
+          </a:ln>
+        </p:spPr>
       </p:sp>
       <p:sp>
         <p:nvSpPr>
@@ -1859,23 +1953,156 @@
         </p:nvSpPr>
         <p:spPr>
           <a:xfrm>
-            <a:off x="6126480" y="3611880"/>
-            <a:ext cx="2377440" cy="731520"/>
+            <a:off x="8641080" y="3474720"/>
+            <a:ext cx="777240" cy="-502920"/>
+          </a:xfrm>
+          <a:prstGeom prst="line">
+            <a:avLst/>
+          </a:prstGeom>
+          <a:noFill/>
+          <a:ln w="22225">
+            <a:solidFill>
+              <a:srgbClr val="5B6B7B"/>
+            </a:solidFill>
+            <a:prstDash val="solid"/>
+            <a:tailEnd type="triangle"/>
+          </a:ln>
+        </p:spPr>
+      </p:sp>
+      <p:sp>
+        <p:nvSpPr>
+          <p:cNvPr id="29" name="Shape 23"/>
+          <p:cNvSpPr/>
+          <p:nvPr/>
+        </p:nvSpPr>
+        <p:spPr>
+          <a:xfrm>
+            <a:off x="9418320" y="2377440"/>
+            <a:ext cx="1463040" cy="960120"/>
           </a:xfrm>
           <a:prstGeom prst="roundRect">
             <a:avLst>
-              <a:gd name="adj" fmla="val 10000"/>
+              <a:gd name="adj" fmla="val 7619"/>
             </a:avLst>
           </a:prstGeom>
           <a:solidFill>
-            <a:srgbClr val="1C7293"/>
-          </a:solidFill>
-          <a:ln/>
+            <a:srgbClr val="21295C"/>
+          </a:solidFill>
+          <a:ln/>
+        </p:spPr>
+      </p:sp>
+      <p:sp>
+        <p:nvSpPr>
+          <p:cNvPr id="30" name="Text 24"/>
+          <p:cNvSpPr/>
+          <p:nvPr/>
+        </p:nvSpPr>
+        <p:spPr>
+          <a:xfrm>
+            <a:off x="9418320" y="2377440"/>
+            <a:ext cx="1463040" cy="960120"/>
+          </a:xfrm>
+          <a:prstGeom prst="rect">
+            <a:avLst/>
+          </a:prstGeom>
+          <a:noFill/>
+          <a:ln/>
+        </p:spPr>
+        <p:txBody>
+          <a:bodyPr wrap="square" lIns="0" tIns="0" rIns="0" bIns="0" rtlCol="0" anchor="ctr"/>
+          <a:lstStyle/>
+          <a:p>
+            <a:pPr algn="ctr" indent="0" marL="0">
+              <a:buNone/>
+            </a:pPr>
+            <a:r>
+              <a:rPr lang="en-US" sz="1250" b="1" dirty="0">
+                <a:solidFill>
+                  <a:srgbClr val="FFFFFF"/>
+                </a:solidFill>
+                <a:latin typeface="Calibri" pitchFamily="34" charset="0"/>
+                <a:ea typeface="Calibri" pitchFamily="34" charset="-122"/>
+                <a:cs typeface="Calibri" pitchFamily="34" charset="-120"/>
+              </a:rPr>
+              <a:t>Python</a:t>
+            </a:r>
+            <a:endParaRPr lang="en-US" sz="1250" dirty="0"/>
+          </a:p>
+          <a:p>
+            <a:pPr algn="ctr" indent="0" marL="0">
+              <a:buNone/>
+            </a:pPr>
+            <a:r>
+              <a:rPr lang="en-US" sz="1250" b="1" dirty="0">
+                <a:solidFill>
+                  <a:srgbClr val="FFFFFF"/>
+                </a:solidFill>
+                <a:latin typeface="Calibri" pitchFamily="34" charset="0"/>
+                <a:ea typeface="Calibri" pitchFamily="34" charset="-122"/>
+                <a:cs typeface="Calibri" pitchFamily="34" charset="-120"/>
+              </a:rPr>
+              <a:t>collectors</a:t>
+            </a:r>
+            <a:endParaRPr lang="en-US" sz="1250" dirty="0"/>
+          </a:p>
+        </p:txBody>
+      </p:sp>
+      <p:sp>
+        <p:nvSpPr>
+          <p:cNvPr id="31" name="Shape 25"/>
+          <p:cNvSpPr/>
+          <p:nvPr/>
+        </p:nvSpPr>
+        <p:spPr>
+          <a:xfrm>
+            <a:off x="9326880" y="3520440"/>
+            <a:ext cx="0" cy="457200"/>
+          </a:xfrm>
+          <a:prstGeom prst="line">
+            <a:avLst/>
+          </a:prstGeom>
+          <a:noFill/>
+          <a:ln w="22225">
+            <a:solidFill>
+              <a:srgbClr val="5B6B7B"/>
+            </a:solidFill>
+            <a:prstDash val="solid"/>
+            <a:tailEnd type="triangle"/>
+          </a:ln>
+        </p:spPr>
+      </p:sp>
+      <p:sp>
+        <p:nvSpPr>
+          <p:cNvPr id="32" name="Shape 26"/>
+          <p:cNvSpPr/>
+          <p:nvPr/>
+        </p:nvSpPr>
+        <p:spPr>
+          <a:xfrm>
+            <a:off x="7955280" y="4023360"/>
+            <a:ext cx="2788920" cy="822960"/>
+          </a:xfrm>
+          <a:prstGeom prst="roundRect">
+            <a:avLst>
+              <a:gd name="adj" fmla="val 8889"/>
+            </a:avLst>
+          </a:prstGeom>
+          <a:solidFill>
+            <a:srgbClr val="2E8B6F"/>
+          </a:solidFill>
+          <a:ln/>
+          <a:effectLst>
+            <a:outerShdw sx="100000" sy="100000" kx="0" ky="0" algn="bl" rotWithShape="0" blurRad="88900" dist="25400" dir="2700000">
+              <a:srgbClr val="000000">
+                <a:alpha val="12000"/>
+              </a:srgbClr>
+            </a:outerShdw>
+          </a:effectLst>
         </p:spPr>
       </p:sp>
       <p:pic>
         <p:nvPicPr>
-          <p:cNvPr id="29" name="Image 4" descr="preencoded.png">    </p:cNvPr>
+          <p:cNvPr id="33" name="Image 4" descr="preencoded.png">    </p:cNvPr>
           <p:cNvPicPr>
             <a:picLocks noChangeAspect="1"/>
           </p:cNvPicPr>
@@ -1889,8 +2116,8 @@
         </p:blipFill>
         <p:spPr>
           <a:xfrm>
-            <a:off x="6309360" y="3794760"/>
-            <a:ext cx="365760" cy="365760"/>
+            <a:off x="8183880" y="4224528"/>
+            <a:ext cx="411480" cy="411480"/>
           </a:xfrm>
           <a:prstGeom prst="rect">
             <a:avLst/>
@@ -1899,30 +2126,30 @@
       </p:pic>
       <p:sp>
         <p:nvSpPr>
-          <p:cNvPr id="30" name="Text 23"/>
-          <p:cNvSpPr/>
-          <p:nvPr/>
-        </p:nvSpPr>
-        <p:spPr>
-          <a:xfrm>
-            <a:off x="6693408" y="3611880"/>
-            <a:ext cx="1783080" cy="731520"/>
-          </a:xfrm>
-          <a:prstGeom prst="rect">
-            <a:avLst/>
-          </a:prstGeom>
-          <a:noFill/>
-          <a:ln/>
-        </p:spPr>
-        <p:txBody>
-          <a:bodyPr wrap="square" lIns="0" tIns="0" rIns="0" bIns="0" rtlCol="0" anchor="ctr"/>
-          <a:lstStyle/>
-          <a:p>
-            <a:pPr indent="0" marL="0">
-              <a:buNone/>
-            </a:pPr>
-            <a:r>
-              <a:rPr lang="en-US" sz="1200" b="1" dirty="0">
+          <p:cNvPr id="34" name="Text 27"/>
+          <p:cNvSpPr/>
+          <p:nvPr/>
+        </p:nvSpPr>
+        <p:spPr>
+          <a:xfrm>
+            <a:off x="8686800" y="4023360"/>
+            <a:ext cx="2011680" cy="822960"/>
+          </a:xfrm>
+          <a:prstGeom prst="rect">
+            <a:avLst/>
+          </a:prstGeom>
+          <a:noFill/>
+          <a:ln/>
+        </p:spPr>
+        <p:txBody>
+          <a:bodyPr wrap="square" lIns="0" tIns="0" rIns="0" bIns="0" rtlCol="0" anchor="ctr"/>
+          <a:lstStyle/>
+          <a:p>
+            <a:pPr indent="0" marL="0">
+              <a:buNone/>
+            </a:pPr>
+            <a:r>
+              <a:rPr lang="en-US" sz="1400" b="1" dirty="0">
                 <a:solidFill>
                   <a:srgbClr val="FFFFFF"/>
                 </a:solidFill>
@@ -1930,218 +2157,76 @@
                 <a:ea typeface="Calibri" pitchFamily="34" charset="-122"/>
                 <a:cs typeface="Calibri" pitchFamily="34" charset="-120"/>
               </a:rPr>
-              <a:t>Monitoring API</a:t>
-            </a:r>
-            <a:endParaRPr lang="en-US" sz="1200" dirty="0"/>
-          </a:p>
-        </p:txBody>
-      </p:sp>
-      <p:sp>
-        <p:nvSpPr>
-          <p:cNvPr id="31" name="Shape 24"/>
-          <p:cNvSpPr/>
-          <p:nvPr/>
-        </p:nvSpPr>
-        <p:spPr>
-          <a:xfrm>
-            <a:off x="8503920" y="2331720"/>
-            <a:ext cx="822960" cy="548640"/>
-          </a:xfrm>
-          <a:prstGeom prst="line">
-            <a:avLst/>
-          </a:prstGeom>
-          <a:noFill/>
-          <a:ln w="20320">
-            <a:solidFill>
-              <a:srgbClr val="5B6B7B"/>
-            </a:solidFill>
-            <a:prstDash val="solid"/>
-            <a:tailEnd type="triangle"/>
-          </a:ln>
-        </p:spPr>
-      </p:sp>
-      <p:sp>
-        <p:nvSpPr>
-          <p:cNvPr id="32" name="Shape 25"/>
-          <p:cNvSpPr/>
-          <p:nvPr/>
-        </p:nvSpPr>
-        <p:spPr>
-          <a:xfrm>
-            <a:off x="8503920" y="3154680"/>
-            <a:ext cx="822960" cy="0"/>
-          </a:xfrm>
-          <a:prstGeom prst="line">
-            <a:avLst/>
-          </a:prstGeom>
-          <a:noFill/>
-          <a:ln w="20320">
-            <a:solidFill>
-              <a:srgbClr val="8FA9BC"/>
-            </a:solidFill>
-            <a:prstDash val="dash"/>
-            <a:tailEnd type="triangle"/>
-          </a:ln>
-        </p:spPr>
-      </p:sp>
-      <p:sp>
-        <p:nvSpPr>
-          <p:cNvPr id="33" name="Shape 26"/>
-          <p:cNvSpPr/>
-          <p:nvPr/>
-        </p:nvSpPr>
-        <p:spPr>
-          <a:xfrm>
-            <a:off x="8503920" y="3977640"/>
-            <a:ext cx="822960" cy="-548640"/>
-          </a:xfrm>
-          <a:prstGeom prst="line">
-            <a:avLst/>
-          </a:prstGeom>
-          <a:noFill/>
-          <a:ln w="20320">
-            <a:solidFill>
-              <a:srgbClr val="5B6B7B"/>
-            </a:solidFill>
-            <a:prstDash val="solid"/>
-            <a:tailEnd type="triangle"/>
-          </a:ln>
-        </p:spPr>
-      </p:sp>
-      <p:sp>
-        <p:nvSpPr>
-          <p:cNvPr id="34" name="Shape 27"/>
-          <p:cNvSpPr/>
-          <p:nvPr/>
-        </p:nvSpPr>
-        <p:spPr>
-          <a:xfrm>
-            <a:off x="9326880" y="2606040"/>
-            <a:ext cx="1417320" cy="1051560"/>
+              <a:t>MongoDB</a:t>
+            </a:r>
+            <a:endParaRPr lang="en-US" sz="1400" dirty="0"/>
+          </a:p>
+        </p:txBody>
+      </p:sp>
+      <p:sp>
+        <p:nvSpPr>
+          <p:cNvPr id="35" name="Text 28"/>
+          <p:cNvSpPr/>
+          <p:nvPr/>
+        </p:nvSpPr>
+        <p:spPr>
+          <a:xfrm>
+            <a:off x="6126480" y="4937760"/>
+            <a:ext cx="5486400" cy="274320"/>
+          </a:xfrm>
+          <a:prstGeom prst="rect">
+            <a:avLst/>
+          </a:prstGeom>
+          <a:noFill/>
+          <a:ln/>
+        </p:spPr>
+        <p:txBody>
+          <a:bodyPr wrap="square" lIns="0" tIns="0" rIns="0" bIns="0" rtlCol="0" anchor="ctr"/>
+          <a:lstStyle/>
+          <a:p>
+            <a:pPr indent="0" marL="0">
+              <a:buNone/>
+            </a:pPr>
+            <a:r>
+              <a:rPr lang="en-US" sz="1100" i="1" dirty="0">
+                <a:solidFill>
+                  <a:srgbClr val="5B6B7B"/>
+                </a:solidFill>
+                <a:latin typeface="Calibri" pitchFamily="34" charset="0"/>
+                <a:ea typeface="Calibri" pitchFamily="34" charset="-122"/>
+                <a:cs typeface="Calibri" pitchFamily="34" charset="-120"/>
+              </a:rPr>
+              <a:t>→  dashboards &amp; anomaly models read Mongo, not GCP</a:t>
+            </a:r>
+            <a:endParaRPr lang="en-US" sz="1100" dirty="0"/>
+          </a:p>
+        </p:txBody>
+      </p:sp>
+      <p:sp>
+        <p:nvSpPr>
+          <p:cNvPr id="36" name="Shape 29"/>
+          <p:cNvSpPr/>
+          <p:nvPr/>
+        </p:nvSpPr>
+        <p:spPr>
+          <a:xfrm>
+            <a:off x="548640" y="5806440"/>
+            <a:ext cx="11292840" cy="713232"/>
           </a:xfrm>
           <a:prstGeom prst="roundRect">
             <a:avLst>
-              <a:gd name="adj" fmla="val 6957"/>
+              <a:gd name="adj" fmla="val 10256"/>
             </a:avLst>
           </a:prstGeom>
           <a:solidFill>
-            <a:srgbClr val="21295C"/>
-          </a:solidFill>
-          <a:ln/>
-        </p:spPr>
-      </p:sp>
-      <p:sp>
-        <p:nvSpPr>
-          <p:cNvPr id="35" name="Text 28"/>
-          <p:cNvSpPr/>
-          <p:nvPr/>
-        </p:nvSpPr>
-        <p:spPr>
-          <a:xfrm>
-            <a:off x="9326880" y="2606040"/>
-            <a:ext cx="1417320" cy="1051560"/>
-          </a:xfrm>
-          <a:prstGeom prst="rect">
-            <a:avLst/>
-          </a:prstGeom>
-          <a:noFill/>
-          <a:ln/>
-        </p:spPr>
-        <p:txBody>
-          <a:bodyPr wrap="square" lIns="0" tIns="0" rIns="0" bIns="0" rtlCol="0" anchor="ctr"/>
-          <a:lstStyle/>
-          <a:p>
-            <a:pPr algn="ctr" indent="0" marL="0">
-              <a:buNone/>
-            </a:pPr>
-            <a:r>
-              <a:rPr lang="en-US" sz="1250" b="1" dirty="0">
-                <a:solidFill>
-                  <a:srgbClr val="FFFFFF"/>
-                </a:solidFill>
-                <a:latin typeface="Calibri" pitchFamily="34" charset="0"/>
-                <a:ea typeface="Calibri" pitchFamily="34" charset="-122"/>
-                <a:cs typeface="Calibri" pitchFamily="34" charset="-120"/>
-              </a:rPr>
-              <a:t>Python</a:t>
-            </a:r>
-            <a:endParaRPr lang="en-US" sz="1250" dirty="0"/>
-          </a:p>
-          <a:p>
-            <a:pPr algn="ctr" indent="0" marL="0">
-              <a:buNone/>
-            </a:pPr>
-            <a:r>
-              <a:rPr lang="en-US" sz="1250" b="1" dirty="0">
-                <a:solidFill>
-                  <a:srgbClr val="FFFFFF"/>
-                </a:solidFill>
-                <a:latin typeface="Calibri" pitchFamily="34" charset="0"/>
-                <a:ea typeface="Calibri" pitchFamily="34" charset="-122"/>
-                <a:cs typeface="Calibri" pitchFamily="34" charset="-120"/>
-              </a:rPr>
-              <a:t>collectors</a:t>
-            </a:r>
-            <a:endParaRPr lang="en-US" sz="1250" dirty="0"/>
-          </a:p>
-        </p:txBody>
-      </p:sp>
-      <p:sp>
-        <p:nvSpPr>
-          <p:cNvPr id="36" name="Shape 29"/>
-          <p:cNvSpPr/>
-          <p:nvPr/>
-        </p:nvSpPr>
-        <p:spPr>
-          <a:xfrm>
-            <a:off x="9235440" y="3840480"/>
-            <a:ext cx="0" cy="457200"/>
-          </a:xfrm>
-          <a:prstGeom prst="line">
-            <a:avLst/>
-          </a:prstGeom>
-          <a:noFill/>
-          <a:ln w="22225">
-            <a:solidFill>
-              <a:srgbClr val="5B6B7B"/>
-            </a:solidFill>
-            <a:prstDash val="solid"/>
-            <a:tailEnd type="triangle"/>
-          </a:ln>
-        </p:spPr>
-      </p:sp>
-      <p:sp>
-        <p:nvSpPr>
-          <p:cNvPr id="37" name="Shape 30"/>
-          <p:cNvSpPr/>
-          <p:nvPr/>
-        </p:nvSpPr>
-        <p:spPr>
-          <a:xfrm>
-            <a:off x="7863840" y="4343400"/>
-            <a:ext cx="2788920" cy="822960"/>
-          </a:xfrm>
-          <a:prstGeom prst="roundRect">
-            <a:avLst>
-              <a:gd name="adj" fmla="val 8889"/>
-            </a:avLst>
-          </a:prstGeom>
-          <a:solidFill>
-            <a:srgbClr val="2E8B6F"/>
-          </a:solidFill>
-          <a:ln/>
-          <a:effectLst>
-            <a:outerShdw sx="100000" sy="100000" kx="0" ky="0" algn="bl" rotWithShape="0" blurRad="88900" dist="25400" dir="2700000">
-              <a:srgbClr val="000000">
-                <a:alpha val="12000"/>
-              </a:srgbClr>
-            </a:outerShdw>
-          </a:effectLst>
+            <a:srgbClr val="E9F1F6"/>
+          </a:solidFill>
+          <a:ln/>
         </p:spPr>
       </p:sp>
       <p:pic>
         <p:nvPicPr>
-          <p:cNvPr id="38" name="Image 5" descr="preencoded.png">    </p:cNvPr>
+          <p:cNvPr id="37" name="Image 5" descr="preencoded.png">    </p:cNvPr>
           <p:cNvPicPr>
             <a:picLocks noChangeAspect="1"/>
           </p:cNvPicPr>
@@ -2155,130 +2240,6 @@
         </p:blipFill>
         <p:spPr>
           <a:xfrm>
-            <a:off x="8092440" y="4544568"/>
-            <a:ext cx="411480" cy="411480"/>
-          </a:xfrm>
-          <a:prstGeom prst="rect">
-            <a:avLst/>
-          </a:prstGeom>
-        </p:spPr>
-      </p:pic>
-      <p:sp>
-        <p:nvSpPr>
-          <p:cNvPr id="39" name="Text 31"/>
-          <p:cNvSpPr/>
-          <p:nvPr/>
-        </p:nvSpPr>
-        <p:spPr>
-          <a:xfrm>
-            <a:off x="8595360" y="4343400"/>
-            <a:ext cx="2011680" cy="822960"/>
-          </a:xfrm>
-          <a:prstGeom prst="rect">
-            <a:avLst/>
-          </a:prstGeom>
-          <a:noFill/>
-          <a:ln/>
-        </p:spPr>
-        <p:txBody>
-          <a:bodyPr wrap="square" lIns="0" tIns="0" rIns="0" bIns="0" rtlCol="0" anchor="ctr"/>
-          <a:lstStyle/>
-          <a:p>
-            <a:pPr indent="0" marL="0">
-              <a:buNone/>
-            </a:pPr>
-            <a:r>
-              <a:rPr lang="en-US" sz="1400" b="1" dirty="0">
-                <a:solidFill>
-                  <a:srgbClr val="FFFFFF"/>
-                </a:solidFill>
-                <a:latin typeface="Calibri" pitchFamily="34" charset="0"/>
-                <a:ea typeface="Calibri" pitchFamily="34" charset="-122"/>
-                <a:cs typeface="Calibri" pitchFamily="34" charset="-120"/>
-              </a:rPr>
-              <a:t>MongoDB</a:t>
-            </a:r>
-            <a:endParaRPr lang="en-US" sz="1400" dirty="0"/>
-          </a:p>
-        </p:txBody>
-      </p:sp>
-      <p:sp>
-        <p:nvSpPr>
-          <p:cNvPr id="40" name="Text 32"/>
-          <p:cNvSpPr/>
-          <p:nvPr/>
-        </p:nvSpPr>
-        <p:spPr>
-          <a:xfrm>
-            <a:off x="6126480" y="5230368"/>
-            <a:ext cx="5486400" cy="274320"/>
-          </a:xfrm>
-          <a:prstGeom prst="rect">
-            <a:avLst/>
-          </a:prstGeom>
-          <a:noFill/>
-          <a:ln/>
-        </p:spPr>
-        <p:txBody>
-          <a:bodyPr wrap="square" lIns="0" tIns="0" rIns="0" bIns="0" rtlCol="0" anchor="ctr"/>
-          <a:lstStyle/>
-          <a:p>
-            <a:pPr indent="0" marL="0">
-              <a:buNone/>
-            </a:pPr>
-            <a:r>
-              <a:rPr lang="en-US" sz="1050" i="1" dirty="0">
-                <a:solidFill>
-                  <a:srgbClr val="5B6B7B"/>
-                </a:solidFill>
-                <a:latin typeface="Calibri" pitchFamily="34" charset="0"/>
-                <a:ea typeface="Calibri" pitchFamily="34" charset="-122"/>
-                <a:cs typeface="Calibri" pitchFamily="34" charset="-120"/>
-              </a:rPr>
-              <a:t>- - -  dashed = pull fallback if no sink</a:t>
-            </a:r>
-            <a:endParaRPr lang="en-US" sz="1050" dirty="0"/>
-          </a:p>
-        </p:txBody>
-      </p:sp>
-      <p:sp>
-        <p:nvSpPr>
-          <p:cNvPr id="41" name="Shape 33"/>
-          <p:cNvSpPr/>
-          <p:nvPr/>
-        </p:nvSpPr>
-        <p:spPr>
-          <a:xfrm>
-            <a:off x="548640" y="5806440"/>
-            <a:ext cx="11064240" cy="713232"/>
-          </a:xfrm>
-          <a:prstGeom prst="roundRect">
-            <a:avLst>
-              <a:gd name="adj" fmla="val 10256"/>
-            </a:avLst>
-          </a:prstGeom>
-          <a:solidFill>
-            <a:srgbClr val="E9F1F6"/>
-          </a:solidFill>
-          <a:ln/>
-        </p:spPr>
-      </p:sp>
-      <p:pic>
-        <p:nvPicPr>
-          <p:cNvPr id="42" name="Image 6" descr="preencoded.png">    </p:cNvPr>
-          <p:cNvPicPr>
-            <a:picLocks noChangeAspect="1"/>
-          </p:cNvPicPr>
-          <p:nvPr/>
-        </p:nvPicPr>
-        <p:blipFill>
-          <a:blip r:embed="rId7"/>
-          <a:stretch>
-            <a:fillRect/>
-          </a:stretch>
-        </p:blipFill>
-        <p:spPr>
-          <a:xfrm>
             <a:off x="777240" y="5989320"/>
             <a:ext cx="365760" cy="365760"/>
           </a:xfrm>
@@ -2289,14 +2250,14 @@
       </p:pic>
       <p:sp>
         <p:nvSpPr>
-          <p:cNvPr id="43" name="Text 34"/>
+          <p:cNvPr id="38" name="Text 30"/>
           <p:cNvSpPr/>
           <p:nvPr/>
         </p:nvSpPr>
         <p:spPr>
           <a:xfrm>
             <a:off x="1280160" y="5806440"/>
-            <a:ext cx="10241280" cy="713232"/>
+            <a:ext cx="10424160" cy="713232"/>
           </a:xfrm>
           <a:prstGeom prst="rect">
             <a:avLst/>
@@ -2320,7 +2281,7 @@
                 <a:ea typeface="Calibri" pitchFamily="34" charset="-122"/>
                 <a:cs typeface="Calibri" pitchFamily="34" charset="-120"/>
               </a:rPr>
-              <a:t>Same as today: </a:t>
+              <a:t>No raw logs, no sink. </a:t>
             </a:r>
             <a:pPr indent="0" marL="0">
               <a:buNone/>
@@ -2334,7 +2295,7 @@
                 <a:ea typeface="Calibri" pitchFamily="34" charset="-122"/>
                 <a:cs typeface="Calibri" pitchFamily="34" charset="-120"/>
               </a:rPr>
-              <a:t>Python jobs on our Linux servers writing to Mongo. </a:t>
+              <a:t>We only need numbers, so GCO computes them from logs and we pull them as metrics — </a:t>
             </a:r>
             <a:pPr indent="0" marL="0">
               <a:buNone/>
@@ -2348,21 +2309,7 @@
                 <a:ea typeface="Calibri" pitchFamily="34" charset="-122"/>
                 <a:cs typeface="Calibri" pitchFamily="34" charset="-120"/>
               </a:rPr>
-              <a:t>What changes: </a:t>
-            </a:r>
-            <a:pPr indent="0" marL="0">
-              <a:buNone/>
-            </a:pPr>
-            <a:r>
-              <a:rPr lang="en-US" sz="1300" dirty="0">
-                <a:solidFill>
-                  <a:srgbClr val="1A1A2E"/>
-                </a:solidFill>
-                <a:latin typeface="Calibri" pitchFamily="34" charset="0"/>
-                <a:ea typeface="Calibri" pitchFamily="34" charset="-122"/>
-                <a:cs typeface="Calibri" pitchFamily="34" charset="-120"/>
-              </a:rPr>
-              <a:t>logs get pushed instead of polled; metrics stay a poll.</a:t>
+              <a:t>simpler &amp; cheaper than shipping raw logs.</a:t>
             </a:r>
             <a:endParaRPr lang="en-US" sz="1300" dirty="0"/>
           </a:p>
@@ -2379,6 +2326,1031 @@
 <file path=ppt/slides/slide2.xml><?xml version="1.0" encoding="utf-8"?>
 <p:sld xmlns:a="http://schemas.openxmlformats.org/drawingml/2006/main" xmlns:r="http://schemas.openxmlformats.org/officeDocument/2006/relationships" xmlns:p="http://schemas.openxmlformats.org/presentationml/2006/main">
   <p:cSld name="Slide 2">
+    <p:bg>
+      <p:bgPr>
+        <a:solidFill>
+          <a:srgbClr val="F4F7FA"/>
+        </a:solidFill>
+      </p:bgPr>
+    </p:bg>
+    <p:spTree>
+      <p:nvGrpSpPr>
+        <p:cNvPr id="1" name=""/>
+        <p:cNvGrpSpPr/>
+        <p:nvPr/>
+      </p:nvGrpSpPr>
+      <p:grpSpPr>
+        <a:xfrm>
+          <a:off x="0" y="0"/>
+          <a:ext cx="0" cy="0"/>
+          <a:chOff x="0" y="0"/>
+          <a:chExt cx="0" cy="0"/>
+        </a:xfrm>
+      </p:grpSpPr>
+      <p:sp>
+        <p:nvSpPr>
+          <p:cNvPr id="2" name="Text 0"/>
+          <p:cNvSpPr/>
+          <p:nvPr/>
+        </p:nvSpPr>
+        <p:spPr>
+          <a:xfrm>
+            <a:off x="548640" y="384048"/>
+            <a:ext cx="10241280" cy="457200"/>
+          </a:xfrm>
+          <a:prstGeom prst="rect">
+            <a:avLst/>
+          </a:prstGeom>
+          <a:noFill/>
+          <a:ln/>
+        </p:spPr>
+        <p:txBody>
+          <a:bodyPr wrap="square" lIns="0" tIns="0" rIns="0" bIns="0" rtlCol="0" anchor="ctr"/>
+          <a:lstStyle/>
+          <a:p>
+            <a:pPr indent="0" marL="0">
+              <a:buNone/>
+            </a:pPr>
+            <a:r>
+              <a:rPr lang="en-US" sz="2500" b="1" dirty="0">
+                <a:solidFill>
+                  <a:srgbClr val="21295C"/>
+                </a:solidFill>
+                <a:latin typeface="Calibri" pitchFamily="34" charset="0"/>
+                <a:ea typeface="Calibri" pitchFamily="34" charset="-122"/>
+                <a:cs typeface="Calibri" pitchFamily="34" charset="-120"/>
+              </a:rPr>
+              <a:t>How our Splunk query becomes a log-based metric</a:t>
+            </a:r>
+            <a:endParaRPr lang="en-US" sz="2500" dirty="0"/>
+          </a:p>
+        </p:txBody>
+      </p:sp>
+      <p:sp>
+        <p:nvSpPr>
+          <p:cNvPr id="3" name="Text 1"/>
+          <p:cNvSpPr/>
+          <p:nvPr/>
+        </p:nvSpPr>
+        <p:spPr>
+          <a:xfrm>
+            <a:off x="548640" y="868680"/>
+            <a:ext cx="9144000" cy="365760"/>
+          </a:xfrm>
+          <a:prstGeom prst="rect">
+            <a:avLst/>
+          </a:prstGeom>
+          <a:noFill/>
+          <a:ln/>
+        </p:spPr>
+        <p:txBody>
+          <a:bodyPr wrap="square" lIns="0" tIns="0" rIns="0" bIns="0" rtlCol="0" anchor="ctr"/>
+          <a:lstStyle/>
+          <a:p>
+            <a:pPr indent="0" marL="0">
+              <a:buNone/>
+            </a:pPr>
+            <a:r>
+              <a:rPr lang="en-US" sz="1500" i="1" dirty="0">
+                <a:solidFill>
+                  <a:srgbClr val="1C7293"/>
+                </a:solidFill>
+                <a:latin typeface="Calibri" pitchFamily="34" charset="0"/>
+                <a:ea typeface="Calibri" pitchFamily="34" charset="-122"/>
+                <a:cs typeface="Calibri" pitchFamily="34" charset="-120"/>
+              </a:rPr>
+              <a:t>Same three steps — filter, aggregate, break out by datacenter</a:t>
+            </a:r>
+            <a:endParaRPr lang="en-US" sz="1500" dirty="0"/>
+          </a:p>
+        </p:txBody>
+      </p:sp>
+      <p:sp>
+        <p:nvSpPr>
+          <p:cNvPr id="4" name="Shape 2"/>
+          <p:cNvSpPr/>
+          <p:nvPr/>
+        </p:nvSpPr>
+        <p:spPr>
+          <a:xfrm>
+            <a:off x="10972800" y="457200"/>
+            <a:ext cx="868680" cy="411480"/>
+          </a:xfrm>
+          <a:prstGeom prst="roundRect">
+            <a:avLst>
+              <a:gd name="adj" fmla="val 17778"/>
+            </a:avLst>
+          </a:prstGeom>
+          <a:solidFill>
+            <a:srgbClr val="21295C"/>
+          </a:solidFill>
+          <a:ln/>
+        </p:spPr>
+      </p:sp>
+      <p:sp>
+        <p:nvSpPr>
+          <p:cNvPr id="5" name="Text 3"/>
+          <p:cNvSpPr/>
+          <p:nvPr/>
+        </p:nvSpPr>
+        <p:spPr>
+          <a:xfrm>
+            <a:off x="10972800" y="457200"/>
+            <a:ext cx="868680" cy="411480"/>
+          </a:xfrm>
+          <a:prstGeom prst="rect">
+            <a:avLst/>
+          </a:prstGeom>
+          <a:noFill/>
+          <a:ln/>
+        </p:spPr>
+        <p:txBody>
+          <a:bodyPr wrap="square" lIns="0" tIns="0" rIns="0" bIns="0" rtlCol="0" anchor="ctr"/>
+          <a:lstStyle/>
+          <a:p>
+            <a:pPr algn="ctr" indent="0" marL="0">
+              <a:buNone/>
+            </a:pPr>
+            <a:r>
+              <a:rPr lang="en-US" sz="1300" b="1" dirty="0">
+                <a:solidFill>
+                  <a:srgbClr val="FFFFFF"/>
+                </a:solidFill>
+                <a:latin typeface="Calibri" pitchFamily="34" charset="0"/>
+                <a:ea typeface="Calibri" pitchFamily="34" charset="-122"/>
+                <a:cs typeface="Calibri" pitchFamily="34" charset="-120"/>
+              </a:rPr>
+              <a:t>2 / 3</a:t>
+            </a:r>
+            <a:endParaRPr lang="en-US" sz="1300" dirty="0"/>
+          </a:p>
+        </p:txBody>
+      </p:sp>
+      <p:sp>
+        <p:nvSpPr>
+          <p:cNvPr id="6" name="Shape 4"/>
+          <p:cNvSpPr/>
+          <p:nvPr/>
+        </p:nvSpPr>
+        <p:spPr>
+          <a:xfrm>
+            <a:off x="548640" y="1508760"/>
+            <a:ext cx="5349240" cy="2788920"/>
+          </a:xfrm>
+          <a:prstGeom prst="roundRect">
+            <a:avLst>
+              <a:gd name="adj" fmla="val 2951"/>
+            </a:avLst>
+          </a:prstGeom>
+          <a:solidFill>
+            <a:srgbClr val="FFFFFF"/>
+          </a:solidFill>
+          <a:ln/>
+          <a:effectLst>
+            <a:outerShdw sx="100000" sy="100000" kx="0" ky="0" algn="bl" rotWithShape="0" blurRad="88900" dist="25400" dir="2700000">
+              <a:srgbClr val="000000">
+                <a:alpha val="12000"/>
+              </a:srgbClr>
+            </a:outerShdw>
+          </a:effectLst>
+        </p:spPr>
+      </p:sp>
+      <p:sp>
+        <p:nvSpPr>
+          <p:cNvPr id="7" name="Text 5"/>
+          <p:cNvSpPr/>
+          <p:nvPr/>
+        </p:nvSpPr>
+        <p:spPr>
+          <a:xfrm>
+            <a:off x="777240" y="1691640"/>
+            <a:ext cx="4572000" cy="320040"/>
+          </a:xfrm>
+          <a:prstGeom prst="rect">
+            <a:avLst/>
+          </a:prstGeom>
+          <a:noFill/>
+          <a:ln/>
+        </p:spPr>
+        <p:txBody>
+          <a:bodyPr wrap="square" lIns="0" tIns="0" rIns="0" bIns="0" rtlCol="0" anchor="ctr"/>
+          <a:lstStyle/>
+          <a:p>
+            <a:pPr indent="0" marL="0">
+              <a:buNone/>
+            </a:pPr>
+            <a:r>
+              <a:rPr lang="en-US" sz="1400" b="1" dirty="0">
+                <a:solidFill>
+                  <a:srgbClr val="5B6B7B"/>
+                </a:solidFill>
+                <a:latin typeface="Calibri" pitchFamily="34" charset="0"/>
+                <a:ea typeface="Calibri" pitchFamily="34" charset="-122"/>
+                <a:cs typeface="Calibri" pitchFamily="34" charset="-120"/>
+              </a:rPr>
+              <a:t>TODAY — Splunk</a:t>
+            </a:r>
+            <a:endParaRPr lang="en-US" sz="1400" dirty="0"/>
+          </a:p>
+        </p:txBody>
+      </p:sp>
+      <p:sp>
+        <p:nvSpPr>
+          <p:cNvPr id="8" name="Text 6"/>
+          <p:cNvSpPr/>
+          <p:nvPr/>
+        </p:nvSpPr>
+        <p:spPr>
+          <a:xfrm>
+            <a:off x="777240" y="2057400"/>
+            <a:ext cx="4892040" cy="1371600"/>
+          </a:xfrm>
+          <a:prstGeom prst="rect">
+            <a:avLst/>
+          </a:prstGeom>
+          <a:noFill/>
+          <a:ln/>
+        </p:spPr>
+        <p:txBody>
+          <a:bodyPr wrap="square" lIns="0" tIns="0" rIns="0" bIns="0" rtlCol="0" anchor="ctr"/>
+          <a:lstStyle/>
+          <a:p>
+            <a:pPr indent="0" marL="0">
+              <a:lnSpc>
+                <a:spcPct val="110000"/>
+              </a:lnSpc>
+              <a:buNone/>
+            </a:pPr>
+            <a:r>
+              <a:rPr lang="en-US" sz="1250" dirty="0">
+                <a:solidFill>
+                  <a:srgbClr val="33414F"/>
+                </a:solidFill>
+                <a:latin typeface="Courier New" pitchFamily="34" charset="0"/>
+                <a:ea typeface="Courier New" pitchFamily="34" charset="-122"/>
+                <a:cs typeface="Courier New" pitchFamily="34" charset="-120"/>
+              </a:rPr>
+              <a:t>index=bt query </a:t>
+            </a:r>
+            <a:endParaRPr lang="en-US" sz="1250" dirty="0"/>
+          </a:p>
+          <a:p>
+            <a:pPr indent="0" marL="0">
+              <a:lnSpc>
+                <a:spcPct val="110000"/>
+              </a:lnSpc>
+              <a:buNone/>
+            </a:pPr>
+            <a:r>
+              <a:rPr lang="en-US" sz="1250" dirty="0">
+                <a:solidFill>
+                  <a:srgbClr val="33414F"/>
+                </a:solidFill>
+                <a:latin typeface="Courier New" pitchFamily="34" charset="0"/>
+                <a:ea typeface="Courier New" pitchFamily="34" charset="-122"/>
+                <a:cs typeface="Courier New" pitchFamily="34" charset="-120"/>
+              </a:rPr>
+              <a:t>| stats sum(total) sum(errors)</a:t>
+            </a:r>
+            <a:endParaRPr lang="en-US" sz="1250" dirty="0"/>
+          </a:p>
+          <a:p>
+            <a:pPr indent="0" marL="0">
+              <a:lnSpc>
+                <a:spcPct val="110000"/>
+              </a:lnSpc>
+              <a:buNone/>
+            </a:pPr>
+            <a:r>
+              <a:rPr lang="en-US" sz="1250" dirty="0">
+                <a:solidFill>
+                  <a:srgbClr val="33414F"/>
+                </a:solidFill>
+                <a:latin typeface="Courier New" pitchFamily="34" charset="0"/>
+                <a:ea typeface="Courier New" pitchFamily="34" charset="-122"/>
+                <a:cs typeface="Courier New" pitchFamily="34" charset="-120"/>
+              </a:rPr>
+              <a:t>| eval failure_pct = ...</a:t>
+            </a:r>
+            <a:endParaRPr lang="en-US" sz="1250" dirty="0"/>
+          </a:p>
+          <a:p>
+            <a:pPr indent="0" marL="0">
+              <a:lnSpc>
+                <a:spcPct val="110000"/>
+              </a:lnSpc>
+              <a:buNone/>
+            </a:pPr>
+            <a:r>
+              <a:rPr lang="en-US" sz="1250" dirty="0">
+                <a:solidFill>
+                  <a:srgbClr val="33414F"/>
+                </a:solidFill>
+                <a:latin typeface="Courier New" pitchFamily="34" charset="0"/>
+                <a:ea typeface="Courier New" pitchFamily="34" charset="-122"/>
+                <a:cs typeface="Courier New" pitchFamily="34" charset="-120"/>
+              </a:rPr>
+              <a:t>| table datacenter, total,</a:t>
+            </a:r>
+            <a:endParaRPr lang="en-US" sz="1250" dirty="0"/>
+          </a:p>
+          <a:p>
+            <a:pPr indent="0" marL="0">
+              <a:lnSpc>
+                <a:spcPct val="110000"/>
+              </a:lnSpc>
+              <a:buNone/>
+            </a:pPr>
+            <a:r>
+              <a:rPr lang="en-US" sz="1250" dirty="0">
+                <a:solidFill>
+                  <a:srgbClr val="33414F"/>
+                </a:solidFill>
+                <a:latin typeface="Courier New" pitchFamily="34" charset="0"/>
+                <a:ea typeface="Courier New" pitchFamily="34" charset="-122"/>
+                <a:cs typeface="Courier New" pitchFamily="34" charset="-120"/>
+              </a:rPr>
+              <a:t>        success, errors, avg_resp</a:t>
+            </a:r>
+            <a:endParaRPr lang="en-US" sz="1250" dirty="0"/>
+          </a:p>
+        </p:txBody>
+      </p:sp>
+      <p:sp>
+        <p:nvSpPr>
+          <p:cNvPr id="9" name="Text 7"/>
+          <p:cNvSpPr/>
+          <p:nvPr/>
+        </p:nvSpPr>
+        <p:spPr>
+          <a:xfrm>
+            <a:off x="777240" y="3611880"/>
+            <a:ext cx="4937760" cy="548640"/>
+          </a:xfrm>
+          <a:prstGeom prst="rect">
+            <a:avLst/>
+          </a:prstGeom>
+          <a:noFill/>
+          <a:ln/>
+        </p:spPr>
+        <p:txBody>
+          <a:bodyPr wrap="square" lIns="0" tIns="0" rIns="0" bIns="0" rtlCol="0" anchor="ctr"/>
+          <a:lstStyle/>
+          <a:p>
+            <a:pPr indent="0" marL="0">
+              <a:buNone/>
+            </a:pPr>
+            <a:r>
+              <a:rPr lang="en-US" sz="1200" i="1" dirty="0">
+                <a:solidFill>
+                  <a:srgbClr val="5B6B7B"/>
+                </a:solidFill>
+                <a:latin typeface="Calibri" pitchFamily="34" charset="0"/>
+                <a:ea typeface="Calibri" pitchFamily="34" charset="-122"/>
+                <a:cs typeface="Calibri" pitchFamily="34" charset="-120"/>
+              </a:rPr>
+              <a:t>→ store one row per BT, per datacenter in Mongo</a:t>
+            </a:r>
+            <a:endParaRPr lang="en-US" sz="1200" dirty="0"/>
+          </a:p>
+        </p:txBody>
+      </p:sp>
+      <p:sp>
+        <p:nvSpPr>
+          <p:cNvPr id="10" name="Shape 8"/>
+          <p:cNvSpPr/>
+          <p:nvPr/>
+        </p:nvSpPr>
+        <p:spPr>
+          <a:xfrm>
+            <a:off x="5989320" y="2880360"/>
+            <a:ext cx="502920" cy="0"/>
+          </a:xfrm>
+          <a:prstGeom prst="line">
+            <a:avLst/>
+          </a:prstGeom>
+          <a:noFill/>
+          <a:ln w="31750">
+            <a:solidFill>
+              <a:srgbClr val="21295C"/>
+            </a:solidFill>
+            <a:prstDash val="solid"/>
+            <a:tailEnd type="triangle"/>
+          </a:ln>
+        </p:spPr>
+      </p:sp>
+      <p:sp>
+        <p:nvSpPr>
+          <p:cNvPr id="11" name="Shape 9"/>
+          <p:cNvSpPr/>
+          <p:nvPr/>
+        </p:nvSpPr>
+        <p:spPr>
+          <a:xfrm>
+            <a:off x="6583680" y="1508760"/>
+            <a:ext cx="5257800" cy="2788920"/>
+          </a:xfrm>
+          <a:prstGeom prst="roundRect">
+            <a:avLst>
+              <a:gd name="adj" fmla="val 2951"/>
+            </a:avLst>
+          </a:prstGeom>
+          <a:solidFill>
+            <a:srgbClr val="21295C"/>
+          </a:solidFill>
+          <a:ln/>
+          <a:effectLst>
+            <a:outerShdw sx="100000" sy="100000" kx="0" ky="0" algn="bl" rotWithShape="0" blurRad="88900" dist="25400" dir="2700000">
+              <a:srgbClr val="000000">
+                <a:alpha val="12000"/>
+              </a:srgbClr>
+            </a:outerShdw>
+          </a:effectLst>
+        </p:spPr>
+      </p:sp>
+      <p:sp>
+        <p:nvSpPr>
+          <p:cNvPr id="12" name="Text 10"/>
+          <p:cNvSpPr/>
+          <p:nvPr/>
+        </p:nvSpPr>
+        <p:spPr>
+          <a:xfrm>
+            <a:off x="6812280" y="1691640"/>
+            <a:ext cx="4572000" cy="320040"/>
+          </a:xfrm>
+          <a:prstGeom prst="rect">
+            <a:avLst/>
+          </a:prstGeom>
+          <a:noFill/>
+          <a:ln/>
+        </p:spPr>
+        <p:txBody>
+          <a:bodyPr wrap="square" lIns="0" tIns="0" rIns="0" bIns="0" rtlCol="0" anchor="ctr"/>
+          <a:lstStyle/>
+          <a:p>
+            <a:pPr indent="0" marL="0">
+              <a:buNone/>
+            </a:pPr>
+            <a:r>
+              <a:rPr lang="en-US" sz="1400" b="1" dirty="0">
+                <a:solidFill>
+                  <a:srgbClr val="ABC4D6"/>
+                </a:solidFill>
+                <a:latin typeface="Calibri" pitchFamily="34" charset="0"/>
+                <a:ea typeface="Calibri" pitchFamily="34" charset="-122"/>
+                <a:cs typeface="Calibri" pitchFamily="34" charset="-120"/>
+              </a:rPr>
+              <a:t>IN GCO — log-based metric</a:t>
+            </a:r>
+            <a:endParaRPr lang="en-US" sz="1400" dirty="0"/>
+          </a:p>
+        </p:txBody>
+      </p:sp>
+      <p:sp>
+        <p:nvSpPr>
+          <p:cNvPr id="13" name="Shape 11"/>
+          <p:cNvSpPr/>
+          <p:nvPr/>
+        </p:nvSpPr>
+        <p:spPr>
+          <a:xfrm>
+            <a:off x="6858000" y="2194560"/>
+            <a:ext cx="457200" cy="457200"/>
+          </a:xfrm>
+          <a:prstGeom prst="ellipse">
+            <a:avLst/>
+          </a:prstGeom>
+          <a:solidFill>
+            <a:srgbClr val="1C7293"/>
+          </a:solidFill>
+          <a:ln/>
+        </p:spPr>
+      </p:sp>
+      <p:pic>
+        <p:nvPicPr>
+          <p:cNvPr id="14" name="Image 0" descr="preencoded.png">    </p:cNvPr>
+          <p:cNvPicPr>
+            <a:picLocks noChangeAspect="1"/>
+          </p:cNvPicPr>
+          <p:nvPr/>
+        </p:nvPicPr>
+        <p:blipFill>
+          <a:blip r:embed="rId1"/>
+          <a:stretch>
+            <a:fillRect/>
+          </a:stretch>
+        </p:blipFill>
+        <p:spPr>
+          <a:xfrm>
+            <a:off x="6967728" y="2304288"/>
+            <a:ext cx="237744" cy="237744"/>
+          </a:xfrm>
+          <a:prstGeom prst="rect">
+            <a:avLst/>
+          </a:prstGeom>
+        </p:spPr>
+      </p:pic>
+      <p:sp>
+        <p:nvSpPr>
+          <p:cNvPr id="15" name="Text 12"/>
+          <p:cNvSpPr/>
+          <p:nvPr/>
+        </p:nvSpPr>
+        <p:spPr>
+          <a:xfrm>
+            <a:off x="7452360" y="2148840"/>
+            <a:ext cx="4251960" cy="548640"/>
+          </a:xfrm>
+          <a:prstGeom prst="rect">
+            <a:avLst/>
+          </a:prstGeom>
+          <a:noFill/>
+          <a:ln/>
+        </p:spPr>
+        <p:txBody>
+          <a:bodyPr wrap="square" lIns="0" tIns="0" rIns="0" bIns="0" rtlCol="0" anchor="ctr"/>
+          <a:lstStyle/>
+          <a:p>
+            <a:pPr indent="0" marL="0">
+              <a:buNone/>
+            </a:pPr>
+            <a:r>
+              <a:rPr lang="en-US" sz="1200" b="1" dirty="0">
+                <a:solidFill>
+                  <a:srgbClr val="FFFFFF"/>
+                </a:solidFill>
+                <a:latin typeface="Calibri" pitchFamily="34" charset="0"/>
+                <a:ea typeface="Calibri" pitchFamily="34" charset="-122"/>
+                <a:cs typeface="Calibri" pitchFamily="34" charset="-120"/>
+              </a:rPr>
+              <a:t>Filter  </a:t>
+            </a:r>
+            <a:pPr indent="0" marL="0">
+              <a:buNone/>
+            </a:pPr>
+            <a:r>
+              <a:rPr lang="en-US" sz="1200" dirty="0">
+                <a:solidFill>
+                  <a:srgbClr val="C9D6E3"/>
+                </a:solidFill>
+                <a:latin typeface="Calibri" pitchFamily="34" charset="0"/>
+                <a:ea typeface="Calibri" pitchFamily="34" charset="-122"/>
+                <a:cs typeface="Calibri" pitchFamily="34" charset="-120"/>
+              </a:rPr>
+              <a:t>the metric's log filter (= your index/query)</a:t>
+            </a:r>
+            <a:endParaRPr lang="en-US" sz="1200" dirty="0"/>
+          </a:p>
+        </p:txBody>
+      </p:sp>
+      <p:sp>
+        <p:nvSpPr>
+          <p:cNvPr id="16" name="Shape 13"/>
+          <p:cNvSpPr/>
+          <p:nvPr/>
+        </p:nvSpPr>
+        <p:spPr>
+          <a:xfrm>
+            <a:off x="6858000" y="2798064"/>
+            <a:ext cx="457200" cy="457200"/>
+          </a:xfrm>
+          <a:prstGeom prst="ellipse">
+            <a:avLst/>
+          </a:prstGeom>
+          <a:solidFill>
+            <a:srgbClr val="1C7293"/>
+          </a:solidFill>
+          <a:ln/>
+        </p:spPr>
+      </p:sp>
+      <p:pic>
+        <p:nvPicPr>
+          <p:cNvPr id="17" name="Image 1" descr="preencoded.png">    </p:cNvPr>
+          <p:cNvPicPr>
+            <a:picLocks noChangeAspect="1"/>
+          </p:cNvPicPr>
+          <p:nvPr/>
+        </p:nvPicPr>
+        <p:blipFill>
+          <a:blip r:embed="rId2"/>
+          <a:stretch>
+            <a:fillRect/>
+          </a:stretch>
+        </p:blipFill>
+        <p:spPr>
+          <a:xfrm>
+            <a:off x="6967728" y="2907792"/>
+            <a:ext cx="237744" cy="237744"/>
+          </a:xfrm>
+          <a:prstGeom prst="rect">
+            <a:avLst/>
+          </a:prstGeom>
+        </p:spPr>
+      </p:pic>
+      <p:sp>
+        <p:nvSpPr>
+          <p:cNvPr id="18" name="Text 14"/>
+          <p:cNvSpPr/>
+          <p:nvPr/>
+        </p:nvSpPr>
+        <p:spPr>
+          <a:xfrm>
+            <a:off x="7452360" y="2752344"/>
+            <a:ext cx="4251960" cy="548640"/>
+          </a:xfrm>
+          <a:prstGeom prst="rect">
+            <a:avLst/>
+          </a:prstGeom>
+          <a:noFill/>
+          <a:ln/>
+        </p:spPr>
+        <p:txBody>
+          <a:bodyPr wrap="square" lIns="0" tIns="0" rIns="0" bIns="0" rtlCol="0" anchor="ctr"/>
+          <a:lstStyle/>
+          <a:p>
+            <a:pPr indent="0" marL="0">
+              <a:buNone/>
+            </a:pPr>
+            <a:r>
+              <a:rPr lang="en-US" sz="1200" b="1" dirty="0">
+                <a:solidFill>
+                  <a:srgbClr val="FFFFFF"/>
+                </a:solidFill>
+                <a:latin typeface="Calibri" pitchFamily="34" charset="0"/>
+                <a:ea typeface="Calibri" pitchFamily="34" charset="-122"/>
+                <a:cs typeface="Calibri" pitchFamily="34" charset="-120"/>
+              </a:rPr>
+              <a:t>Aggregate  </a:t>
+            </a:r>
+            <a:pPr indent="0" marL="0">
+              <a:buNone/>
+            </a:pPr>
+            <a:r>
+              <a:rPr lang="en-US" sz="1200" dirty="0">
+                <a:solidFill>
+                  <a:srgbClr val="C9D6E3"/>
+                </a:solidFill>
+                <a:latin typeface="Calibri" pitchFamily="34" charset="0"/>
+                <a:ea typeface="Calibri" pitchFamily="34" charset="-122"/>
+                <a:cs typeface="Calibri" pitchFamily="34" charset="-120"/>
+              </a:rPr>
+              <a:t>counter for total/errors, distribution for response time</a:t>
+            </a:r>
+            <a:endParaRPr lang="en-US" sz="1200" dirty="0"/>
+          </a:p>
+        </p:txBody>
+      </p:sp>
+      <p:sp>
+        <p:nvSpPr>
+          <p:cNvPr id="19" name="Shape 15"/>
+          <p:cNvSpPr/>
+          <p:nvPr/>
+        </p:nvSpPr>
+        <p:spPr>
+          <a:xfrm>
+            <a:off x="6858000" y="3401568"/>
+            <a:ext cx="457200" cy="457200"/>
+          </a:xfrm>
+          <a:prstGeom prst="ellipse">
+            <a:avLst/>
+          </a:prstGeom>
+          <a:solidFill>
+            <a:srgbClr val="1C7293"/>
+          </a:solidFill>
+          <a:ln/>
+        </p:spPr>
+      </p:sp>
+      <p:pic>
+        <p:nvPicPr>
+          <p:cNvPr id="20" name="Image 2" descr="preencoded.png">    </p:cNvPr>
+          <p:cNvPicPr>
+            <a:picLocks noChangeAspect="1"/>
+          </p:cNvPicPr>
+          <p:nvPr/>
+        </p:nvPicPr>
+        <p:blipFill>
+          <a:blip r:embed="rId3"/>
+          <a:stretch>
+            <a:fillRect/>
+          </a:stretch>
+        </p:blipFill>
+        <p:spPr>
+          <a:xfrm>
+            <a:off x="6967728" y="3511296"/>
+            <a:ext cx="237744" cy="237744"/>
+          </a:xfrm>
+          <a:prstGeom prst="rect">
+            <a:avLst/>
+          </a:prstGeom>
+        </p:spPr>
+      </p:pic>
+      <p:sp>
+        <p:nvSpPr>
+          <p:cNvPr id="21" name="Text 16"/>
+          <p:cNvSpPr/>
+          <p:nvPr/>
+        </p:nvSpPr>
+        <p:spPr>
+          <a:xfrm>
+            <a:off x="7452360" y="3355848"/>
+            <a:ext cx="4251960" cy="548640"/>
+          </a:xfrm>
+          <a:prstGeom prst="rect">
+            <a:avLst/>
+          </a:prstGeom>
+          <a:noFill/>
+          <a:ln/>
+        </p:spPr>
+        <p:txBody>
+          <a:bodyPr wrap="square" lIns="0" tIns="0" rIns="0" bIns="0" rtlCol="0" anchor="ctr"/>
+          <a:lstStyle/>
+          <a:p>
+            <a:pPr indent="0" marL="0">
+              <a:buNone/>
+            </a:pPr>
+            <a:r>
+              <a:rPr lang="en-US" sz="1200" b="1" dirty="0">
+                <a:solidFill>
+                  <a:srgbClr val="FFFFFF"/>
+                </a:solidFill>
+                <a:latin typeface="Calibri" pitchFamily="34" charset="0"/>
+                <a:ea typeface="Calibri" pitchFamily="34" charset="-122"/>
+                <a:cs typeface="Calibri" pitchFamily="34" charset="-120"/>
+              </a:rPr>
+              <a:t>Labels  </a:t>
+            </a:r>
+            <a:pPr indent="0" marL="0">
+              <a:buNone/>
+            </a:pPr>
+            <a:r>
+              <a:rPr lang="en-US" sz="1200" dirty="0">
+                <a:solidFill>
+                  <a:srgbClr val="C9D6E3"/>
+                </a:solidFill>
+                <a:latin typeface="Calibri" pitchFamily="34" charset="0"/>
+                <a:ea typeface="Calibri" pitchFamily="34" charset="-122"/>
+                <a:cs typeface="Calibri" pitchFamily="34" charset="-120"/>
+              </a:rPr>
+              <a:t>datacenter + BT name (= your table columns)</a:t>
+            </a:r>
+            <a:endParaRPr lang="en-US" sz="1200" dirty="0"/>
+          </a:p>
+        </p:txBody>
+      </p:sp>
+      <p:sp>
+        <p:nvSpPr>
+          <p:cNvPr id="22" name="Text 17"/>
+          <p:cNvSpPr/>
+          <p:nvPr/>
+        </p:nvSpPr>
+        <p:spPr>
+          <a:xfrm>
+            <a:off x="6812280" y="4005072"/>
+            <a:ext cx="4937760" cy="274320"/>
+          </a:xfrm>
+          <a:prstGeom prst="rect">
+            <a:avLst/>
+          </a:prstGeom>
+          <a:noFill/>
+          <a:ln/>
+        </p:spPr>
+        <p:txBody>
+          <a:bodyPr wrap="square" lIns="0" tIns="0" rIns="0" bIns="0" rtlCol="0" anchor="ctr"/>
+          <a:lstStyle/>
+          <a:p>
+            <a:pPr indent="0" marL="0">
+              <a:buNone/>
+            </a:pPr>
+            <a:r>
+              <a:rPr lang="en-US" sz="1150" i="1" dirty="0">
+                <a:solidFill>
+                  <a:srgbClr val="ABC4D6"/>
+                </a:solidFill>
+                <a:latin typeface="Calibri" pitchFamily="34" charset="0"/>
+                <a:ea typeface="Calibri" pitchFamily="34" charset="-122"/>
+                <a:cs typeface="Calibri" pitchFamily="34" charset="-120"/>
+              </a:rPr>
+              <a:t>→ we read these as time series &amp; build the same Mongo doc</a:t>
+            </a:r>
+            <a:endParaRPr lang="en-US" sz="1150" dirty="0"/>
+          </a:p>
+        </p:txBody>
+      </p:sp>
+      <p:sp>
+        <p:nvSpPr>
+          <p:cNvPr id="23" name="Shape 18"/>
+          <p:cNvSpPr/>
+          <p:nvPr/>
+        </p:nvSpPr>
+        <p:spPr>
+          <a:xfrm>
+            <a:off x="548640" y="4617720"/>
+            <a:ext cx="11292840" cy="1417320"/>
+          </a:xfrm>
+          <a:prstGeom prst="roundRect">
+            <a:avLst>
+              <a:gd name="adj" fmla="val 5161"/>
+            </a:avLst>
+          </a:prstGeom>
+          <a:solidFill>
+            <a:srgbClr val="FFFFFF"/>
+          </a:solidFill>
+          <a:ln/>
+          <a:effectLst>
+            <a:outerShdw sx="100000" sy="100000" kx="0" ky="0" algn="bl" rotWithShape="0" blurRad="88900" dist="25400" dir="2700000">
+              <a:srgbClr val="000000">
+                <a:alpha val="12000"/>
+              </a:srgbClr>
+            </a:outerShdw>
+          </a:effectLst>
+        </p:spPr>
+      </p:sp>
+      <p:sp>
+        <p:nvSpPr>
+          <p:cNvPr id="24" name="Text 19"/>
+          <p:cNvSpPr/>
+          <p:nvPr/>
+        </p:nvSpPr>
+        <p:spPr>
+          <a:xfrm>
+            <a:off x="822960" y="4754880"/>
+            <a:ext cx="7315200" cy="320040"/>
+          </a:xfrm>
+          <a:prstGeom prst="rect">
+            <a:avLst/>
+          </a:prstGeom>
+          <a:noFill/>
+          <a:ln/>
+        </p:spPr>
+        <p:txBody>
+          <a:bodyPr wrap="square" lIns="0" tIns="0" rIns="0" bIns="0" rtlCol="0" anchor="ctr"/>
+          <a:lstStyle/>
+          <a:p>
+            <a:pPr indent="0" marL="0">
+              <a:buNone/>
+            </a:pPr>
+            <a:r>
+              <a:rPr lang="en-US" sz="1400" b="1" dirty="0">
+                <a:solidFill>
+                  <a:srgbClr val="21295C"/>
+                </a:solidFill>
+                <a:latin typeface="Calibri" pitchFamily="34" charset="0"/>
+                <a:ea typeface="Calibri" pitchFamily="34" charset="-122"/>
+                <a:cs typeface="Calibri" pitchFamily="34" charset="-120"/>
+              </a:rPr>
+              <a:t>Two things this depends on</a:t>
+            </a:r>
+            <a:endParaRPr lang="en-US" sz="1400" dirty="0"/>
+          </a:p>
+        </p:txBody>
+      </p:sp>
+      <p:sp>
+        <p:nvSpPr>
+          <p:cNvPr id="25" name="Text 20"/>
+          <p:cNvSpPr/>
+          <p:nvPr/>
+        </p:nvSpPr>
+        <p:spPr>
+          <a:xfrm>
+            <a:off x="822960" y="5074920"/>
+            <a:ext cx="10698480" cy="868680"/>
+          </a:xfrm>
+          <a:prstGeom prst="rect">
+            <a:avLst/>
+          </a:prstGeom>
+          <a:noFill/>
+          <a:ln/>
+        </p:spPr>
+        <p:txBody>
+          <a:bodyPr wrap="square" lIns="0" tIns="0" rIns="0" bIns="0" rtlCol="0" anchor="ctr"/>
+          <a:lstStyle/>
+          <a:p>
+            <a:pPr indent="0" marL="0">
+              <a:lnSpc>
+                <a:spcPct val="105000"/>
+              </a:lnSpc>
+              <a:buNone/>
+            </a:pPr>
+            <a:r>
+              <a:rPr lang="en-US" sz="1200" b="1" dirty="0">
+                <a:solidFill>
+                  <a:srgbClr val="C77D2E"/>
+                </a:solidFill>
+                <a:latin typeface="Calibri" pitchFamily="34" charset="0"/>
+                <a:ea typeface="Calibri" pitchFamily="34" charset="-122"/>
+                <a:cs typeface="Calibri" pitchFamily="34" charset="-120"/>
+              </a:rPr>
+              <a:t>Structured fields:  </a:t>
+            </a:r>
+            <a:pPr indent="0" marL="0">
+              <a:lnSpc>
+                <a:spcPct val="105000"/>
+              </a:lnSpc>
+              <a:buNone/>
+            </a:pPr>
+            <a:r>
+              <a:rPr lang="en-US" sz="1200" dirty="0">
+                <a:solidFill>
+                  <a:srgbClr val="33414F"/>
+                </a:solidFill>
+                <a:latin typeface="Calibri" pitchFamily="34" charset="0"/>
+                <a:ea typeface="Calibri" pitchFamily="34" charset="-122"/>
+                <a:cs typeface="Calibri" pitchFamily="34" charset="-120"/>
+              </a:rPr>
+              <a:t>response time / status must be real JSON fields (jsonPayload), not buried in a text line — a distribution metric can only read a numeric field.</a:t>
+            </a:r>
+            <a:endParaRPr lang="en-US" sz="1200" dirty="0"/>
+          </a:p>
+          <a:p>
+            <a:pPr indent="0" marL="0">
+              <a:lnSpc>
+                <a:spcPct val="105000"/>
+              </a:lnSpc>
+              <a:buNone/>
+            </a:pPr>
+            <a:r>
+              <a:rPr lang="en-US" sz="1200" b="1" dirty="0">
+                <a:solidFill>
+                  <a:srgbClr val="C77D2E"/>
+                </a:solidFill>
+                <a:latin typeface="Calibri" pitchFamily="34" charset="0"/>
+                <a:ea typeface="Calibri" pitchFamily="34" charset="-122"/>
+                <a:cs typeface="Calibri" pitchFamily="34" charset="-120"/>
+              </a:rPr>
+              <a:t>Cardinality:  </a:t>
+            </a:r>
+            <a:pPr indent="0" marL="0">
+              <a:lnSpc>
+                <a:spcPct val="105000"/>
+              </a:lnSpc>
+              <a:buNone/>
+            </a:pPr>
+            <a:r>
+              <a:rPr lang="en-US" sz="1200" dirty="0">
+                <a:solidFill>
+                  <a:srgbClr val="33414F"/>
+                </a:solidFill>
+                <a:latin typeface="Calibri" pitchFamily="34" charset="0"/>
+                <a:ea typeface="Calibri" pitchFamily="34" charset="-122"/>
+                <a:cs typeface="Calibri" pitchFamily="34" charset="-120"/>
+              </a:rPr>
+              <a:t>datacenter × BT name = number of time series; same 1M free-tier math as our infra metrics, so we keep label combinations sensible.</a:t>
+            </a:r>
+            <a:endParaRPr lang="en-US" sz="1200" dirty="0"/>
+          </a:p>
+        </p:txBody>
+      </p:sp>
+      <p:sp>
+        <p:nvSpPr>
+          <p:cNvPr id="26" name="Text 21"/>
+          <p:cNvSpPr/>
+          <p:nvPr/>
+        </p:nvSpPr>
+        <p:spPr>
+          <a:xfrm>
+            <a:off x="548640" y="6172200"/>
+            <a:ext cx="11292840" cy="320040"/>
+          </a:xfrm>
+          <a:prstGeom prst="rect">
+            <a:avLst/>
+          </a:prstGeom>
+          <a:noFill/>
+          <a:ln/>
+        </p:spPr>
+        <p:txBody>
+          <a:bodyPr wrap="square" lIns="0" tIns="0" rIns="0" bIns="0" rtlCol="0" anchor="ctr"/>
+          <a:lstStyle/>
+          <a:p>
+            <a:pPr algn="ctr" indent="0" marL="0">
+              <a:buNone/>
+            </a:pPr>
+            <a:r>
+              <a:rPr lang="en-US" sz="1100" i="1" dirty="0">
+                <a:solidFill>
+                  <a:srgbClr val="5B6B7B"/>
+                </a:solidFill>
+                <a:latin typeface="Calibri" pitchFamily="34" charset="0"/>
+                <a:ea typeface="Calibri" pitchFamily="34" charset="-122"/>
+                <a:cs typeface="Calibri" pitchFamily="34" charset="-120"/>
+              </a:rPr>
+              <a:t>Failure % and any custom availability logic we keep in Python; native metrics handle the straightforward counts.</a:t>
+            </a:r>
+            <a:endParaRPr lang="en-US" sz="1100" dirty="0"/>
+          </a:p>
+        </p:txBody>
+      </p:sp>
+    </p:spTree>
+  </p:cSld>
+  <p:clrMapOvr>
+    <a:masterClrMapping/>
+  </p:clrMapOvr>
+</p:sld>
+</file>
+
+<file path=ppt/slides/slide3.xml><?xml version="1.0" encoding="utf-8"?>
+<p:sld xmlns:a="http://schemas.openxmlformats.org/drawingml/2006/main" xmlns:r="http://schemas.openxmlformats.org/officeDocument/2006/relationships" xmlns:p="http://schemas.openxmlformats.org/presentationml/2006/main">
+  <p:cSld name="Slide 3">
     <p:bg>
       <p:bgPr>
         <a:solidFill>
@@ -2486,8 +3458,8 @@
         </p:nvSpPr>
         <p:spPr>
           <a:xfrm>
-            <a:off x="10515600" y="548640"/>
-            <a:ext cx="1097280" cy="411480"/>
+            <a:off x="10972800" y="457200"/>
+            <a:ext cx="868680" cy="411480"/>
           </a:xfrm>
           <a:prstGeom prst="roundRect">
             <a:avLst>
@@ -2508,8 +3480,8 @@
         </p:nvSpPr>
         <p:spPr>
           <a:xfrm>
-            <a:off x="10515600" y="548640"/>
-            <a:ext cx="1097280" cy="411480"/>
+            <a:off x="10972800" y="457200"/>
+            <a:ext cx="868680" cy="411480"/>
           </a:xfrm>
           <a:prstGeom prst="rect">
             <a:avLst/>
@@ -2533,7 +3505,7 @@
                 <a:ea typeface="Calibri" pitchFamily="34" charset="-122"/>
                 <a:cs typeface="Calibri" pitchFamily="34" charset="-120"/>
               </a:rPr>
-              <a:t>2 / 2</a:t>
+              <a:t>3 / 3</a:t>
             </a:r>
             <a:endParaRPr lang="en-US" sz="1300" dirty="0"/>
           </a:p>
@@ -2726,7 +3698,7 @@
                 <a:ea typeface="Calibri" pitchFamily="34" charset="-122"/>
                 <a:cs typeface="Calibri" pitchFamily="34" charset="-120"/>
               </a:rPr>
-              <a:t>A service account per job with read-only roles (monitoring.viewer, logging.viewer) on the specific projects holding our data. Keyless via Workload Identity Federation if possible.</a:t>
+              <a:t>A service account per job with read-only roles (monitoring.viewer, logging.viewer) on the projects holding our data. Keyless via Workload Identity Federation if possible.</a:t>
             </a:r>
             <a:endParaRPr lang="en-US" sz="1200" dirty="0"/>
           </a:p>
@@ -2877,7 +3849,7 @@
                 <a:ea typeface="Calibri" pitchFamily="34" charset="-122"/>
                 <a:cs typeface="Calibri" pitchFamily="34" charset="-120"/>
               </a:rPr>
-              <a:t>A sink → Pub/Sub for logs</a:t>
+              <a:t>Define our log-based metrics</a:t>
             </a:r>
             <a:endParaRPr lang="en-US" sz="1650" dirty="0"/>
           </a:p>
@@ -2919,7 +3891,7 @@
                 <a:ea typeface="Calibri" pitchFamily="34" charset="-122"/>
                 <a:cs typeface="Calibri" pitchFamily="34" charset="-120"/>
               </a:rPr>
-              <a:t>Sink created on the logs we need, routing to a Pub/Sub topic, plus a dedicated subscription for us with pubsub.subscriber. Confirm the sink's writer identity can publish.</a:t>
+              <a:t>Counter metrics for total / errors / availability, distribution on response-time, labelled by datacenter + BT name. Who owns creating these metric definitions?</a:t>
             </a:r>
             <a:endParaRPr lang="en-US" sz="1200" dirty="0"/>
           </a:p>
@@ -3070,7 +4042,7 @@
                 <a:ea typeface="Calibri" pitchFamily="34" charset="-122"/>
                 <a:cs typeface="Calibri" pitchFamily="34" charset="-120"/>
               </a:rPr>
-              <a:t>Quotas &amp; data confirmation</a:t>
+              <a:t>Confirm the data &amp; budget</a:t>
             </a:r>
             <a:endParaRPr lang="en-US" sz="1650" dirty="0"/>
           </a:p>
@@ -3112,7 +4084,7 @@
                 <a:ea typeface="Calibri" pitchFamily="34" charset="-122"/>
                 <a:cs typeface="Calibri" pitchFamily="34" charset="-120"/>
               </a:rPr>
-              <a:t>Our project's Logging read-rate quota and who approves increases. Confirm our business/app fields are ingested (jsonPayload) and retained long enough for our analysis window.</a:t>
+              <a:t>Are our BT fields (status, response time) structured as jsonPayload? And roughly how many datacenter × BT combinations — so we size against the 1M time-series free tier?</a:t>
             </a:r>
             <a:endParaRPr lang="en-US" sz="1200" dirty="0"/>
           </a:p>
@@ -3305,7 +4277,7 @@
                 <a:ea typeface="Calibri" pitchFamily="34" charset="-122"/>
                 <a:cs typeface="Calibri" pitchFamily="34" charset="-120"/>
               </a:rPr>
-              <a:t>Do our Linux hosts allow outbound gRPC/HTTP-2 to Google APIs, or are we REST-only? Who owns sink / topic / subscription creation, and what's the request SLA?</a:t>
+              <a:t>Do our Linux hosts allow outbound gRPC/HTTP-2 to Google APIs, or are we REST-only? Who approves metric-definition and quota requests, and what's the SLA?</a:t>
             </a:r>
             <a:endParaRPr lang="en-US" sz="1200" dirty="0"/>
           </a:p>
@@ -3320,7 +4292,7 @@
         <p:spPr>
           <a:xfrm>
             <a:off x="548640" y="6355080"/>
-            <a:ext cx="11064240" cy="320040"/>
+            <a:ext cx="11292840" cy="320040"/>
           </a:xfrm>
           <a:prstGeom prst="rect">
             <a:avLst/>
@@ -3344,7 +4316,7 @@
                 <a:ea typeface="Calibri" pitchFamily="34" charset="-122"/>
                 <a:cs typeface="Calibri" pitchFamily="34" charset="-120"/>
               </a:rPr>
-              <a:t>Full detail (sizing math, code, REST fallback) is in the prep document if anyone wants to go deeper.</a:t>
+              <a:t>Full detail (sizing math, code, fallbacks) is in the prep document if anyone wants to go deeper.</a:t>
             </a:r>
             <a:endParaRPr lang="en-US" sz="1150" dirty="0"/>
           </a:p>
